--- a/presentation/Synchus_Operational_Memory.pptx
+++ b/presentation/Synchus_Operational_Memory.pptx
@@ -2,20 +2,20 @@
 <file path=ppt/presentation.xml><?xml version="1.0" encoding="utf-8"?>
 <p:presentation xmlns:p="http://schemas.openxmlformats.org/presentationml/2006/main">
   <p:sldMasterIdLst>
-    <p:sldMasterId xmlns:r="http://schemas.openxmlformats.org/officeDocument/2006/relationships" id="2147483648" r:id="R1d6c8a1c42104276"/>
+    <p:sldMasterId xmlns:r="http://schemas.openxmlformats.org/officeDocument/2006/relationships" id="2147483648" r:id="R058d9515b6544b8b"/>
   </p:sldMasterIdLst>
   <p:notesMasterIdLst>
-    <p:notesMasterId xmlns:r="http://schemas.openxmlformats.org/officeDocument/2006/relationships" r:id="Rf1337c9acfb54cf3"/>
+    <p:notesMasterId xmlns:r="http://schemas.openxmlformats.org/officeDocument/2006/relationships" r:id="Rb4648f3a049a4e09"/>
   </p:notesMasterIdLst>
   <p:sldIdLst>
-    <p:sldId xmlns:r="http://schemas.openxmlformats.org/officeDocument/2006/relationships" id="256" r:id="R2fd03535d14c4b5e"/>
-    <p:sldId xmlns:r="http://schemas.openxmlformats.org/officeDocument/2006/relationships" id="257" r:id="R4acbd923ffbe4f72"/>
-    <p:sldId xmlns:r="http://schemas.openxmlformats.org/officeDocument/2006/relationships" id="258" r:id="Rc33aac0161ab4df1"/>
-    <p:sldId xmlns:r="http://schemas.openxmlformats.org/officeDocument/2006/relationships" id="259" r:id="R05e0b75cfff94166"/>
-    <p:sldId xmlns:r="http://schemas.openxmlformats.org/officeDocument/2006/relationships" id="260" r:id="R5bdbaa21058c47ad"/>
-    <p:sldId xmlns:r="http://schemas.openxmlformats.org/officeDocument/2006/relationships" id="261" r:id="R3f4b3d214f3d4685"/>
-    <p:sldId xmlns:r="http://schemas.openxmlformats.org/officeDocument/2006/relationships" id="262" r:id="R666e301de9c347c8"/>
-    <p:sldId xmlns:r="http://schemas.openxmlformats.org/officeDocument/2006/relationships" id="263" r:id="R1308dcd2cd7e49f5"/>
+    <p:sldId xmlns:r="http://schemas.openxmlformats.org/officeDocument/2006/relationships" id="256" r:id="R8cf0f62d560e4f2b"/>
+    <p:sldId xmlns:r="http://schemas.openxmlformats.org/officeDocument/2006/relationships" id="257" r:id="Re89928dd5aaa48cb"/>
+    <p:sldId xmlns:r="http://schemas.openxmlformats.org/officeDocument/2006/relationships" id="258" r:id="Rd212dffb4df04940"/>
+    <p:sldId xmlns:r="http://schemas.openxmlformats.org/officeDocument/2006/relationships" id="259" r:id="R8393e86a406e47ad"/>
+    <p:sldId xmlns:r="http://schemas.openxmlformats.org/officeDocument/2006/relationships" id="260" r:id="R153b943a118c4851"/>
+    <p:sldId xmlns:r="http://schemas.openxmlformats.org/officeDocument/2006/relationships" id="261" r:id="Raf7ae262a1444105"/>
+    <p:sldId xmlns:r="http://schemas.openxmlformats.org/officeDocument/2006/relationships" id="262" r:id="R4d6ca9fa34134c10"/>
+    <p:sldId xmlns:r="http://schemas.openxmlformats.org/officeDocument/2006/relationships" id="263" r:id="R84618f545ceb43a1"/>
   </p:sldIdLst>
   <p:sldSz cx="18288000" cy="10287000"/>
   <p:notesSz cx="6858000" cy="9144000"/>
@@ -1127,7 +1127,7 @@
   </p:cSld>
   <p:clrMap bg1="lt1" tx1="dk1" bg2="lt2" tx2="dk2" accent1="accent1" accent2="accent2" accent3="accent3" accent4="accent4" accent5="accent5" accent6="accent6" hlink="hlink" folHlink="folHlink"/>
   <p:sldLayoutIdLst>
-    <p:sldLayoutId xmlns:r="http://schemas.openxmlformats.org/officeDocument/2006/relationships" id="2147483649" r:id="R06a56fa132d84f22"/>
+    <p:sldLayoutId xmlns:r="http://schemas.openxmlformats.org/officeDocument/2006/relationships" id="2147483649" r:id="R410bdeb0b41641f1"/>
   </p:sldLayoutIdLst>
   <p:txStyles>
     <p:titleStyle>
@@ -1682,7 +1682,7 @@
           <p:nvPr/>
         </p:nvPicPr>
         <p:blipFill>
-          <a:blip xmlns:r="http://schemas.openxmlformats.org/officeDocument/2006/relationships" xmlns:a="http://schemas.openxmlformats.org/drawingml/2006/main" r:embed="R209fff9bc3204f7e"/>
+          <a:blip xmlns:r="http://schemas.openxmlformats.org/officeDocument/2006/relationships" xmlns:a="http://schemas.openxmlformats.org/drawingml/2006/main" r:embed="R0f24d9fca47244ac"/>
           <a:srcRect xmlns:a="http://schemas.openxmlformats.org/drawingml/2006/main" l="20379" t="0" r="20379" b="0"/>
           <a:stretch xmlns:a="http://schemas.openxmlformats.org/drawingml/2006/main">
             <a:fillRect l="0" t="0" r="0" b="0"/>
@@ -1705,7 +1705,7 @@
           <p:cNvPr id="2" name="">
             <a:extLst xmlns:a="http://schemas.openxmlformats.org/drawingml/2006/main">
               <a:ext uri="{FF2B5EF4-FFF2-40B4-BE49-F238E27FC236}">
-                <a16:creationId xmlns:a16="http://schemas.microsoft.com/office/drawing/2014/main" id="{FCFF455B-C8B2-4AAA-A215-AE77976C8566}"/>
+                <a16:creationId xmlns:a16="http://schemas.microsoft.com/office/drawing/2014/main" id="{EF99AACB-A7DB-4BBB-A92A-586C2B44F01D}"/>
               </a:ext>
             </a:extLst>
           </p:cNvPr>
@@ -1738,7 +1738,7 @@
           <p:cNvPr id="3" name="">
             <a:extLst xmlns:a="http://schemas.openxmlformats.org/drawingml/2006/main">
               <a:ext uri="{FF2B5EF4-FFF2-40B4-BE49-F238E27FC236}">
-                <a16:creationId xmlns:a16="http://schemas.microsoft.com/office/drawing/2014/main" id="{8A544545-7EEF-4174-B78D-5EE6E75A68FE}"/>
+                <a16:creationId xmlns:a16="http://schemas.microsoft.com/office/drawing/2014/main" id="{05B7B206-4FC0-4B78-AEFC-9DF4BEA76193}"/>
               </a:ext>
             </a:extLst>
           </p:cNvPr>
@@ -1788,7 +1788,7 @@
           <p:cNvPr id="4" name="">
             <a:extLst xmlns:a="http://schemas.openxmlformats.org/drawingml/2006/main">
               <a:ext uri="{FF2B5EF4-FFF2-40B4-BE49-F238E27FC236}">
-                <a16:creationId xmlns:a16="http://schemas.microsoft.com/office/drawing/2014/main" id="{4867DBC5-FDEE-4E3F-A316-DA112B7A5302}"/>
+                <a16:creationId xmlns:a16="http://schemas.microsoft.com/office/drawing/2014/main" id="{263CDB51-9654-4456-B3EE-60A9C5E7565B}"/>
               </a:ext>
             </a:extLst>
           </p:cNvPr>
@@ -1838,7 +1838,7 @@
           <p:cNvPr id="5" name="">
             <a:extLst xmlns:a="http://schemas.openxmlformats.org/drawingml/2006/main">
               <a:ext uri="{FF2B5EF4-FFF2-40B4-BE49-F238E27FC236}">
-                <a16:creationId xmlns:a16="http://schemas.microsoft.com/office/drawing/2014/main" id="{42BA7B8A-53BB-4A65-A997-2D59B7427C5B}"/>
+                <a16:creationId xmlns:a16="http://schemas.microsoft.com/office/drawing/2014/main" id="{69E78E7A-34E2-4CA3-A010-1AD0B87A8337}"/>
               </a:ext>
             </a:extLst>
           </p:cNvPr>
@@ -1888,7 +1888,7 @@
           <p:cNvPr id="6" name="">
             <a:extLst xmlns:a="http://schemas.openxmlformats.org/drawingml/2006/main">
               <a:ext uri="{FF2B5EF4-FFF2-40B4-BE49-F238E27FC236}">
-                <a16:creationId xmlns:a16="http://schemas.microsoft.com/office/drawing/2014/main" id="{4CBC6390-086D-4437-9ADC-C68220225A88}"/>
+                <a16:creationId xmlns:a16="http://schemas.microsoft.com/office/drawing/2014/main" id="{C485410C-6048-40C3-A6B7-504364D2230F}"/>
               </a:ext>
             </a:extLst>
           </p:cNvPr>
@@ -1938,7 +1938,7 @@
           <p:cNvPr id="7" name="">
             <a:extLst xmlns:a="http://schemas.openxmlformats.org/drawingml/2006/main">
               <a:ext uri="{FF2B5EF4-FFF2-40B4-BE49-F238E27FC236}">
-                <a16:creationId xmlns:a16="http://schemas.microsoft.com/office/drawing/2014/main" id="{D28D5FA6-4D07-4628-AE74-69A917ADCC83}"/>
+                <a16:creationId xmlns:a16="http://schemas.microsoft.com/office/drawing/2014/main" id="{42E15B07-8EC6-4781-9814-506C15130744}"/>
               </a:ext>
             </a:extLst>
           </p:cNvPr>
@@ -1971,7 +1971,7 @@
           <p:cNvPr id="8" name="">
             <a:extLst xmlns:a="http://schemas.openxmlformats.org/drawingml/2006/main">
               <a:ext uri="{FF2B5EF4-FFF2-40B4-BE49-F238E27FC236}">
-                <a16:creationId xmlns:a16="http://schemas.microsoft.com/office/drawing/2014/main" id="{8DA94951-F987-4C9B-BC7A-E02AAEEC2441}"/>
+                <a16:creationId xmlns:a16="http://schemas.microsoft.com/office/drawing/2014/main" id="{64038645-1AA0-4D8F-9785-EEF2D4BF85DF}"/>
               </a:ext>
             </a:extLst>
           </p:cNvPr>
@@ -2021,7 +2021,7 @@
           <p:cNvPr id="9" name="">
             <a:extLst xmlns:a="http://schemas.openxmlformats.org/drawingml/2006/main">
               <a:ext uri="{FF2B5EF4-FFF2-40B4-BE49-F238E27FC236}">
-                <a16:creationId xmlns:a16="http://schemas.microsoft.com/office/drawing/2014/main" id="{E64BD096-F502-429C-B47E-2DF17774AF6D}"/>
+                <a16:creationId xmlns:a16="http://schemas.microsoft.com/office/drawing/2014/main" id="{3702FB74-B4FD-4298-AA61-8E6C72AA9101}"/>
               </a:ext>
             </a:extLst>
           </p:cNvPr>
@@ -2071,7 +2071,7 @@
           <p:cNvPr id="10" name="">
             <a:extLst xmlns:a="http://schemas.openxmlformats.org/drawingml/2006/main">
               <a:ext uri="{FF2B5EF4-FFF2-40B4-BE49-F238E27FC236}">
-                <a16:creationId xmlns:a16="http://schemas.microsoft.com/office/drawing/2014/main" id="{AF1E8107-297C-4F97-B44A-D8C7D5B32F90}"/>
+                <a16:creationId xmlns:a16="http://schemas.microsoft.com/office/drawing/2014/main" id="{3A18C76D-D40B-4872-A46B-EA8BCA9880B7}"/>
               </a:ext>
             </a:extLst>
           </p:cNvPr>
@@ -2119,7 +2119,7 @@
     </p:spTree>
     <p:extLst>
       <p:ext uri="{BB962C8B-B14F-4D97-AF65-F5344CB8AC3E}">
-        <p14:creationId xmlns:p14="http://schemas.microsoft.com/office/powerpoint/2010/main" val="645464247"/>
+        <p14:creationId xmlns:p14="http://schemas.microsoft.com/office/powerpoint/2010/main" val="1452614537"/>
       </p:ext>
     </p:extLst>
   </p:cSld>
@@ -2150,7 +2150,7 @@
           <p:cNvPr id="23" name="">
             <a:extLst xmlns:a="http://schemas.openxmlformats.org/drawingml/2006/main">
               <a:ext uri="{FF2B5EF4-FFF2-40B4-BE49-F238E27FC236}">
-                <a16:creationId xmlns:a16="http://schemas.microsoft.com/office/drawing/2014/main" id="{51BB7245-6B06-447F-A621-B091B7DFE2C6}"/>
+                <a16:creationId xmlns:a16="http://schemas.microsoft.com/office/drawing/2014/main" id="{7CC2406E-3BF1-466E-8CC3-77230A8369E1}"/>
               </a:ext>
             </a:extLst>
           </p:cNvPr>
@@ -2200,7 +2200,7 @@
           <p:cNvPr id="2" name="">
             <a:extLst xmlns:a="http://schemas.openxmlformats.org/drawingml/2006/main">
               <a:ext uri="{FF2B5EF4-FFF2-40B4-BE49-F238E27FC236}">
-                <a16:creationId xmlns:a16="http://schemas.microsoft.com/office/drawing/2014/main" id="{79432E1E-A0B0-4731-8AE1-57A2B4E0CDF8}"/>
+                <a16:creationId xmlns:a16="http://schemas.microsoft.com/office/drawing/2014/main" id="{3908A0B1-0CFA-4CB2-95EB-9FEB87A866B4}"/>
               </a:ext>
             </a:extLst>
           </p:cNvPr>
@@ -2250,7 +2250,7 @@
           <p:cNvPr id="3" name="">
             <a:extLst xmlns:a="http://schemas.openxmlformats.org/drawingml/2006/main">
               <a:ext uri="{FF2B5EF4-FFF2-40B4-BE49-F238E27FC236}">
-                <a16:creationId xmlns:a16="http://schemas.microsoft.com/office/drawing/2014/main" id="{C0CE9E45-ABDC-413B-8A09-F9519DCF4A36}"/>
+                <a16:creationId xmlns:a16="http://schemas.microsoft.com/office/drawing/2014/main" id="{26EDF8CC-3B7E-496D-92B5-C0FC5FE6402B}"/>
               </a:ext>
             </a:extLst>
           </p:cNvPr>
@@ -2300,7 +2300,7 @@
           <p:cNvPr id="4" name="">
             <a:extLst xmlns:a="http://schemas.openxmlformats.org/drawingml/2006/main">
               <a:ext uri="{FF2B5EF4-FFF2-40B4-BE49-F238E27FC236}">
-                <a16:creationId xmlns:a16="http://schemas.microsoft.com/office/drawing/2014/main" id="{729C4861-DB88-47E3-BD35-8CD0FDFC264E}"/>
+                <a16:creationId xmlns:a16="http://schemas.microsoft.com/office/drawing/2014/main" id="{8B4A7BD2-C08C-4754-B942-7B0456AE9F5C}"/>
               </a:ext>
             </a:extLst>
           </p:cNvPr>
@@ -2335,7 +2335,7 @@
           <p:cNvPr id="5" name="">
             <a:extLst xmlns:a="http://schemas.openxmlformats.org/drawingml/2006/main">
               <a:ext uri="{FF2B5EF4-FFF2-40B4-BE49-F238E27FC236}">
-                <a16:creationId xmlns:a16="http://schemas.microsoft.com/office/drawing/2014/main" id="{EBCC4C14-551D-43C0-BFDD-6643603F0C92}"/>
+                <a16:creationId xmlns:a16="http://schemas.microsoft.com/office/drawing/2014/main" id="{11C27E07-4A39-4285-9F65-FC3A20E30507}"/>
               </a:ext>
             </a:extLst>
           </p:cNvPr>
@@ -2368,7 +2368,7 @@
           <p:cNvPr id="6" name="">
             <a:extLst xmlns:a="http://schemas.openxmlformats.org/drawingml/2006/main">
               <a:ext uri="{FF2B5EF4-FFF2-40B4-BE49-F238E27FC236}">
-                <a16:creationId xmlns:a16="http://schemas.microsoft.com/office/drawing/2014/main" id="{1C11D329-F2B3-4993-BA98-09F5E3AFC173}"/>
+                <a16:creationId xmlns:a16="http://schemas.microsoft.com/office/drawing/2014/main" id="{EB855A33-42FA-4E91-B062-4D37A51FB753}"/>
               </a:ext>
             </a:extLst>
           </p:cNvPr>
@@ -2418,7 +2418,7 @@
           <p:cNvPr id="7" name="">
             <a:extLst xmlns:a="http://schemas.openxmlformats.org/drawingml/2006/main">
               <a:ext uri="{FF2B5EF4-FFF2-40B4-BE49-F238E27FC236}">
-                <a16:creationId xmlns:a16="http://schemas.microsoft.com/office/drawing/2014/main" id="{F0DF800F-6960-4DF6-8EE1-4BF34B47003F}"/>
+                <a16:creationId xmlns:a16="http://schemas.microsoft.com/office/drawing/2014/main" id="{726D739F-FE0E-46E3-8E3D-FC03A7808F9D}"/>
               </a:ext>
             </a:extLst>
           </p:cNvPr>
@@ -2468,7 +2468,7 @@
           <p:cNvPr id="8" name="">
             <a:extLst xmlns:a="http://schemas.openxmlformats.org/drawingml/2006/main">
               <a:ext uri="{FF2B5EF4-FFF2-40B4-BE49-F238E27FC236}">
-                <a16:creationId xmlns:a16="http://schemas.microsoft.com/office/drawing/2014/main" id="{D9407EAE-5C93-4C37-B08C-451667B0351C}"/>
+                <a16:creationId xmlns:a16="http://schemas.microsoft.com/office/drawing/2014/main" id="{6C6DAF77-3A11-4E00-A664-6F21BC3C0A5B}"/>
               </a:ext>
             </a:extLst>
           </p:cNvPr>
@@ -2535,7 +2535,7 @@
           <p:cNvPr id="9" name="">
             <a:extLst xmlns:a="http://schemas.openxmlformats.org/drawingml/2006/main">
               <a:ext uri="{FF2B5EF4-FFF2-40B4-BE49-F238E27FC236}">
-                <a16:creationId xmlns:a16="http://schemas.microsoft.com/office/drawing/2014/main" id="{B31BEB7C-2639-4646-B25F-9A0BC244A08C}"/>
+                <a16:creationId xmlns:a16="http://schemas.microsoft.com/office/drawing/2014/main" id="{3AE0E182-AD53-46DB-ADA5-4D04C2E361C6}"/>
               </a:ext>
             </a:extLst>
           </p:cNvPr>
@@ -2570,7 +2570,7 @@
           <p:cNvPr id="10" name="">
             <a:extLst xmlns:a="http://schemas.openxmlformats.org/drawingml/2006/main">
               <a:ext uri="{FF2B5EF4-FFF2-40B4-BE49-F238E27FC236}">
-                <a16:creationId xmlns:a16="http://schemas.microsoft.com/office/drawing/2014/main" id="{96889744-A42E-477C-A8AB-CFA53B0E7079}"/>
+                <a16:creationId xmlns:a16="http://schemas.microsoft.com/office/drawing/2014/main" id="{8F72872C-FF47-4A2B-9160-9AD89BCAF36F}"/>
               </a:ext>
             </a:extLst>
           </p:cNvPr>
@@ -2603,7 +2603,7 @@
           <p:cNvPr id="11" name="">
             <a:extLst xmlns:a="http://schemas.openxmlformats.org/drawingml/2006/main">
               <a:ext uri="{FF2B5EF4-FFF2-40B4-BE49-F238E27FC236}">
-                <a16:creationId xmlns:a16="http://schemas.microsoft.com/office/drawing/2014/main" id="{B47B0397-F594-4F45-BFA3-8A1EB98A1840}"/>
+                <a16:creationId xmlns:a16="http://schemas.microsoft.com/office/drawing/2014/main" id="{906E2341-A424-4E8C-AF06-B6C2D213D965}"/>
               </a:ext>
             </a:extLst>
           </p:cNvPr>
@@ -2653,7 +2653,7 @@
           <p:cNvPr id="12" name="">
             <a:extLst xmlns:a="http://schemas.openxmlformats.org/drawingml/2006/main">
               <a:ext uri="{FF2B5EF4-FFF2-40B4-BE49-F238E27FC236}">
-                <a16:creationId xmlns:a16="http://schemas.microsoft.com/office/drawing/2014/main" id="{BE80373C-89AD-440D-9230-7E08C1807CE6}"/>
+                <a16:creationId xmlns:a16="http://schemas.microsoft.com/office/drawing/2014/main" id="{5079B40E-2BB1-4D9B-97E5-071679D5326D}"/>
               </a:ext>
             </a:extLst>
           </p:cNvPr>
@@ -2703,7 +2703,7 @@
           <p:cNvPr id="13" name="">
             <a:extLst xmlns:a="http://schemas.openxmlformats.org/drawingml/2006/main">
               <a:ext uri="{FF2B5EF4-FFF2-40B4-BE49-F238E27FC236}">
-                <a16:creationId xmlns:a16="http://schemas.microsoft.com/office/drawing/2014/main" id="{E89335C6-7F0B-4FEA-9B4C-67EC26504256}"/>
+                <a16:creationId xmlns:a16="http://schemas.microsoft.com/office/drawing/2014/main" id="{B02CED7A-DBD4-49E5-AC5B-07AB61F75FAA}"/>
               </a:ext>
             </a:extLst>
           </p:cNvPr>
@@ -2770,7 +2770,7 @@
           <p:cNvPr id="14" name="">
             <a:extLst xmlns:a="http://schemas.openxmlformats.org/drawingml/2006/main">
               <a:ext uri="{FF2B5EF4-FFF2-40B4-BE49-F238E27FC236}">
-                <a16:creationId xmlns:a16="http://schemas.microsoft.com/office/drawing/2014/main" id="{63B5567F-F339-4239-8C3F-32667BC22EB5}"/>
+                <a16:creationId xmlns:a16="http://schemas.microsoft.com/office/drawing/2014/main" id="{68A5E818-7CE4-4977-9DBB-2262F0A062CF}"/>
               </a:ext>
             </a:extLst>
           </p:cNvPr>
@@ -2805,7 +2805,7 @@
           <p:cNvPr id="15" name="">
             <a:extLst xmlns:a="http://schemas.openxmlformats.org/drawingml/2006/main">
               <a:ext uri="{FF2B5EF4-FFF2-40B4-BE49-F238E27FC236}">
-                <a16:creationId xmlns:a16="http://schemas.microsoft.com/office/drawing/2014/main" id="{C07FA2F3-2835-4BE7-8EBC-AA85338B6076}"/>
+                <a16:creationId xmlns:a16="http://schemas.microsoft.com/office/drawing/2014/main" id="{ACAF21A0-B945-4CB1-9715-91DE4C5A210E}"/>
               </a:ext>
             </a:extLst>
           </p:cNvPr>
@@ -2838,7 +2838,7 @@
           <p:cNvPr id="16" name="">
             <a:extLst xmlns:a="http://schemas.openxmlformats.org/drawingml/2006/main">
               <a:ext uri="{FF2B5EF4-FFF2-40B4-BE49-F238E27FC236}">
-                <a16:creationId xmlns:a16="http://schemas.microsoft.com/office/drawing/2014/main" id="{9BF79F86-78EF-4CE1-9CE2-B08979409244}"/>
+                <a16:creationId xmlns:a16="http://schemas.microsoft.com/office/drawing/2014/main" id="{2399C3FE-18C7-4130-874F-25E1E35887D3}"/>
               </a:ext>
             </a:extLst>
           </p:cNvPr>
@@ -2888,7 +2888,7 @@
           <p:cNvPr id="17" name="">
             <a:extLst xmlns:a="http://schemas.openxmlformats.org/drawingml/2006/main">
               <a:ext uri="{FF2B5EF4-FFF2-40B4-BE49-F238E27FC236}">
-                <a16:creationId xmlns:a16="http://schemas.microsoft.com/office/drawing/2014/main" id="{1149A42B-10AA-4E40-90E0-059072745C36}"/>
+                <a16:creationId xmlns:a16="http://schemas.microsoft.com/office/drawing/2014/main" id="{1BD0A5EC-6D4A-4516-B6F3-CB70964687F1}"/>
               </a:ext>
             </a:extLst>
           </p:cNvPr>
@@ -2938,7 +2938,7 @@
           <p:cNvPr id="18" name="">
             <a:extLst xmlns:a="http://schemas.openxmlformats.org/drawingml/2006/main">
               <a:ext uri="{FF2B5EF4-FFF2-40B4-BE49-F238E27FC236}">
-                <a16:creationId xmlns:a16="http://schemas.microsoft.com/office/drawing/2014/main" id="{FD06AE53-C96F-4007-81CC-5460B0D62A71}"/>
+                <a16:creationId xmlns:a16="http://schemas.microsoft.com/office/drawing/2014/main" id="{6001326B-0966-430E-9285-4F0FA638210F}"/>
               </a:ext>
             </a:extLst>
           </p:cNvPr>
@@ -3005,7 +3005,7 @@
           <p:cNvPr id="19" name="">
             <a:extLst xmlns:a="http://schemas.openxmlformats.org/drawingml/2006/main">
               <a:ext uri="{FF2B5EF4-FFF2-40B4-BE49-F238E27FC236}">
-                <a16:creationId xmlns:a16="http://schemas.microsoft.com/office/drawing/2014/main" id="{8175DD2B-D1D2-4409-8A4E-737F49AA832A}"/>
+                <a16:creationId xmlns:a16="http://schemas.microsoft.com/office/drawing/2014/main" id="{0F7E40FD-C0ED-431F-8B73-932A7E70DD02}"/>
               </a:ext>
             </a:extLst>
           </p:cNvPr>
@@ -3038,7 +3038,7 @@
           <p:cNvPr id="20" name="">
             <a:extLst xmlns:a="http://schemas.openxmlformats.org/drawingml/2006/main">
               <a:ext uri="{FF2B5EF4-FFF2-40B4-BE49-F238E27FC236}">
-                <a16:creationId xmlns:a16="http://schemas.microsoft.com/office/drawing/2014/main" id="{A3D8948A-1DEC-4859-89D6-456C28006789}"/>
+                <a16:creationId xmlns:a16="http://schemas.microsoft.com/office/drawing/2014/main" id="{06EC556D-73E0-4F45-85CB-2E606E7E4636}"/>
               </a:ext>
             </a:extLst>
           </p:cNvPr>
@@ -3088,7 +3088,7 @@
           <p:cNvPr id="21" name="">
             <a:extLst xmlns:a="http://schemas.openxmlformats.org/drawingml/2006/main">
               <a:ext uri="{FF2B5EF4-FFF2-40B4-BE49-F238E27FC236}">
-                <a16:creationId xmlns:a16="http://schemas.microsoft.com/office/drawing/2014/main" id="{FE363630-AACC-4CB5-A7C8-E03B388C5E03}"/>
+                <a16:creationId xmlns:a16="http://schemas.microsoft.com/office/drawing/2014/main" id="{E46C246D-01D1-4B36-A874-FDED9F359B3F}"/>
               </a:ext>
             </a:extLst>
           </p:cNvPr>
@@ -3138,7 +3138,7 @@
           <p:cNvPr id="22" name="">
             <a:extLst xmlns:a="http://schemas.openxmlformats.org/drawingml/2006/main">
               <a:ext uri="{FF2B5EF4-FFF2-40B4-BE49-F238E27FC236}">
-                <a16:creationId xmlns:a16="http://schemas.microsoft.com/office/drawing/2014/main" id="{9D57E066-7215-412F-8990-3DB407EC32A7}"/>
+                <a16:creationId xmlns:a16="http://schemas.microsoft.com/office/drawing/2014/main" id="{2BFA2F1F-2D0F-4BA4-B033-A4F5354BEAC6}"/>
               </a:ext>
             </a:extLst>
           </p:cNvPr>
@@ -3186,7 +3186,7 @@
     </p:spTree>
     <p:extLst>
       <p:ext uri="{BB962C8B-B14F-4D97-AF65-F5344CB8AC3E}">
-        <p14:creationId xmlns:p14="http://schemas.microsoft.com/office/powerpoint/2010/main" val="149339250"/>
+        <p14:creationId xmlns:p14="http://schemas.microsoft.com/office/powerpoint/2010/main" val="1803452988"/>
       </p:ext>
     </p:extLst>
   </p:cSld>
@@ -3217,7 +3217,7 @@
           <p:cNvPr id="28" name="">
             <a:extLst xmlns:a="http://schemas.openxmlformats.org/drawingml/2006/main">
               <a:ext uri="{FF2B5EF4-FFF2-40B4-BE49-F238E27FC236}">
-                <a16:creationId xmlns:a16="http://schemas.microsoft.com/office/drawing/2014/main" id="{49285714-F704-477C-9EFF-EE6BAC3FB0D6}"/>
+                <a16:creationId xmlns:a16="http://schemas.microsoft.com/office/drawing/2014/main" id="{ED6C76AB-79DE-4AE0-B42D-016A4C7DE2D7}"/>
               </a:ext>
             </a:extLst>
           </p:cNvPr>
@@ -3267,7 +3267,7 @@
           <p:cNvPr id="2" name="">
             <a:extLst xmlns:a="http://schemas.openxmlformats.org/drawingml/2006/main">
               <a:ext uri="{FF2B5EF4-FFF2-40B4-BE49-F238E27FC236}">
-                <a16:creationId xmlns:a16="http://schemas.microsoft.com/office/drawing/2014/main" id="{1C95C473-3CDD-44BE-B7FE-72F330DC1188}"/>
+                <a16:creationId xmlns:a16="http://schemas.microsoft.com/office/drawing/2014/main" id="{9E700E26-6DA7-45F1-9101-F4B23A93A7A2}"/>
               </a:ext>
             </a:extLst>
           </p:cNvPr>
@@ -3317,7 +3317,7 @@
           <p:cNvPr id="3" name="">
             <a:extLst xmlns:a="http://schemas.openxmlformats.org/drawingml/2006/main">
               <a:ext uri="{FF2B5EF4-FFF2-40B4-BE49-F238E27FC236}">
-                <a16:creationId xmlns:a16="http://schemas.microsoft.com/office/drawing/2014/main" id="{54681A9A-532D-4A8E-A5E1-5AA811A33B0C}"/>
+                <a16:creationId xmlns:a16="http://schemas.microsoft.com/office/drawing/2014/main" id="{3A0CF98C-0626-4880-B1F9-55AFBE109DD6}"/>
               </a:ext>
             </a:extLst>
           </p:cNvPr>
@@ -3367,7 +3367,7 @@
           <p:cNvPr id="4" name="">
             <a:extLst xmlns:a="http://schemas.openxmlformats.org/drawingml/2006/main">
               <a:ext uri="{FF2B5EF4-FFF2-40B4-BE49-F238E27FC236}">
-                <a16:creationId xmlns:a16="http://schemas.microsoft.com/office/drawing/2014/main" id="{C27F9D18-9C95-4CA6-A8E3-B453F55C22F9}"/>
+                <a16:creationId xmlns:a16="http://schemas.microsoft.com/office/drawing/2014/main" id="{DF786B2A-3E60-4A32-A258-5725E6DE8C4B}"/>
               </a:ext>
             </a:extLst>
           </p:cNvPr>
@@ -3402,7 +3402,7 @@
           <p:cNvPr id="5" name="">
             <a:extLst xmlns:a="http://schemas.openxmlformats.org/drawingml/2006/main">
               <a:ext uri="{FF2B5EF4-FFF2-40B4-BE49-F238E27FC236}">
-                <a16:creationId xmlns:a16="http://schemas.microsoft.com/office/drawing/2014/main" id="{F3B8B64B-2346-4505-9757-F749EDE1AC8F}"/>
+                <a16:creationId xmlns:a16="http://schemas.microsoft.com/office/drawing/2014/main" id="{35BEEE1D-0D50-4522-9B57-4829AC57AA5A}"/>
               </a:ext>
             </a:extLst>
           </p:cNvPr>
@@ -3452,7 +3452,7 @@
           <p:cNvPr id="6" name="">
             <a:extLst xmlns:a="http://schemas.openxmlformats.org/drawingml/2006/main">
               <a:ext uri="{FF2B5EF4-FFF2-40B4-BE49-F238E27FC236}">
-                <a16:creationId xmlns:a16="http://schemas.microsoft.com/office/drawing/2014/main" id="{7D52AF86-5660-42CD-80A5-1C40387EBF44}"/>
+                <a16:creationId xmlns:a16="http://schemas.microsoft.com/office/drawing/2014/main" id="{3963A4A9-8FDD-4FF6-BBC2-9714C26719D1}"/>
               </a:ext>
             </a:extLst>
           </p:cNvPr>
@@ -3502,7 +3502,7 @@
           <p:cNvPr id="7" name="">
             <a:extLst xmlns:a="http://schemas.openxmlformats.org/drawingml/2006/main">
               <a:ext uri="{FF2B5EF4-FFF2-40B4-BE49-F238E27FC236}">
-                <a16:creationId xmlns:a16="http://schemas.microsoft.com/office/drawing/2014/main" id="{59DDFB5A-27FB-4404-BF74-B7AF65B9CB64}"/>
+                <a16:creationId xmlns:a16="http://schemas.microsoft.com/office/drawing/2014/main" id="{62DC3A96-0987-42DB-A17A-07AD664431CA}"/>
               </a:ext>
             </a:extLst>
           </p:cNvPr>
@@ -3569,7 +3569,7 @@
           <p:cNvPr id="8" name="">
             <a:extLst xmlns:a="http://schemas.openxmlformats.org/drawingml/2006/main">
               <a:ext uri="{FF2B5EF4-FFF2-40B4-BE49-F238E27FC236}">
-                <a16:creationId xmlns:a16="http://schemas.microsoft.com/office/drawing/2014/main" id="{729C760F-7E71-4136-8951-0C16F4D0BA02}"/>
+                <a16:creationId xmlns:a16="http://schemas.microsoft.com/office/drawing/2014/main" id="{F9FC7C93-B1A0-4622-9481-C8EA2ABA2CE1}"/>
               </a:ext>
             </a:extLst>
           </p:cNvPr>
@@ -3619,7 +3619,7 @@
           <p:cNvPr id="9" name="">
             <a:extLst xmlns:a="http://schemas.openxmlformats.org/drawingml/2006/main">
               <a:ext uri="{FF2B5EF4-FFF2-40B4-BE49-F238E27FC236}">
-                <a16:creationId xmlns:a16="http://schemas.microsoft.com/office/drawing/2014/main" id="{911C6592-F4B0-4DA5-A665-21268FEE9F65}"/>
+                <a16:creationId xmlns:a16="http://schemas.microsoft.com/office/drawing/2014/main" id="{554FEB1E-B916-4C3A-946F-DBED7F826392}"/>
               </a:ext>
             </a:extLst>
           </p:cNvPr>
@@ -3654,7 +3654,7 @@
           <p:cNvPr id="10" name="">
             <a:extLst xmlns:a="http://schemas.openxmlformats.org/drawingml/2006/main">
               <a:ext uri="{FF2B5EF4-FFF2-40B4-BE49-F238E27FC236}">
-                <a16:creationId xmlns:a16="http://schemas.microsoft.com/office/drawing/2014/main" id="{7F6FAF27-29CE-44ED-BD68-E1F41AF6843B}"/>
+                <a16:creationId xmlns:a16="http://schemas.microsoft.com/office/drawing/2014/main" id="{11062123-1935-43A9-9877-AEACA60962D1}"/>
               </a:ext>
             </a:extLst>
           </p:cNvPr>
@@ -3704,7 +3704,7 @@
           <p:cNvPr id="11" name="">
             <a:extLst xmlns:a="http://schemas.openxmlformats.org/drawingml/2006/main">
               <a:ext uri="{FF2B5EF4-FFF2-40B4-BE49-F238E27FC236}">
-                <a16:creationId xmlns:a16="http://schemas.microsoft.com/office/drawing/2014/main" id="{0DDE74B6-A28A-4CAC-AEC0-E7572B94B7E4}"/>
+                <a16:creationId xmlns:a16="http://schemas.microsoft.com/office/drawing/2014/main" id="{C3EA6250-A3A0-4469-A29D-3EFEA7243A78}"/>
               </a:ext>
             </a:extLst>
           </p:cNvPr>
@@ -3754,7 +3754,7 @@
           <p:cNvPr id="12" name="">
             <a:extLst xmlns:a="http://schemas.openxmlformats.org/drawingml/2006/main">
               <a:ext uri="{FF2B5EF4-FFF2-40B4-BE49-F238E27FC236}">
-                <a16:creationId xmlns:a16="http://schemas.microsoft.com/office/drawing/2014/main" id="{B259C299-757B-41FD-A79B-24A5CD565F70}"/>
+                <a16:creationId xmlns:a16="http://schemas.microsoft.com/office/drawing/2014/main" id="{26F40C23-4C39-4FB0-928C-C4B3D0905FA9}"/>
               </a:ext>
             </a:extLst>
           </p:cNvPr>
@@ -3821,7 +3821,7 @@
           <p:cNvPr id="13" name="">
             <a:extLst xmlns:a="http://schemas.openxmlformats.org/drawingml/2006/main">
               <a:ext uri="{FF2B5EF4-FFF2-40B4-BE49-F238E27FC236}">
-                <a16:creationId xmlns:a16="http://schemas.microsoft.com/office/drawing/2014/main" id="{3FEAB1B5-E6D7-4BAA-888B-9E5488B6146A}"/>
+                <a16:creationId xmlns:a16="http://schemas.microsoft.com/office/drawing/2014/main" id="{DEA82669-8F4A-4642-B5C4-52022164CC37}"/>
               </a:ext>
             </a:extLst>
           </p:cNvPr>
@@ -3871,7 +3871,7 @@
           <p:cNvPr id="14" name="">
             <a:extLst xmlns:a="http://schemas.openxmlformats.org/drawingml/2006/main">
               <a:ext uri="{FF2B5EF4-FFF2-40B4-BE49-F238E27FC236}">
-                <a16:creationId xmlns:a16="http://schemas.microsoft.com/office/drawing/2014/main" id="{1D31BE8B-FBAF-4C6B-9766-5F16FF743755}"/>
+                <a16:creationId xmlns:a16="http://schemas.microsoft.com/office/drawing/2014/main" id="{20C40A5D-7090-4462-87B1-193659D3DAD0}"/>
               </a:ext>
             </a:extLst>
           </p:cNvPr>
@@ -3906,7 +3906,7 @@
           <p:cNvPr id="15" name="">
             <a:extLst xmlns:a="http://schemas.openxmlformats.org/drawingml/2006/main">
               <a:ext uri="{FF2B5EF4-FFF2-40B4-BE49-F238E27FC236}">
-                <a16:creationId xmlns:a16="http://schemas.microsoft.com/office/drawing/2014/main" id="{6DB88298-922E-48A0-B409-6316E0F4903D}"/>
+                <a16:creationId xmlns:a16="http://schemas.microsoft.com/office/drawing/2014/main" id="{B62A9DE8-37A2-4D3B-A63C-993E8FCFD772}"/>
               </a:ext>
             </a:extLst>
           </p:cNvPr>
@@ -3956,7 +3956,7 @@
           <p:cNvPr id="16" name="">
             <a:extLst xmlns:a="http://schemas.openxmlformats.org/drawingml/2006/main">
               <a:ext uri="{FF2B5EF4-FFF2-40B4-BE49-F238E27FC236}">
-                <a16:creationId xmlns:a16="http://schemas.microsoft.com/office/drawing/2014/main" id="{1F72D117-D09E-4130-9051-6C07AAF8F06D}"/>
+                <a16:creationId xmlns:a16="http://schemas.microsoft.com/office/drawing/2014/main" id="{D9CFFC17-E88E-4241-9CE1-D13FF844A7BA}"/>
               </a:ext>
             </a:extLst>
           </p:cNvPr>
@@ -4006,7 +4006,7 @@
           <p:cNvPr id="17" name="">
             <a:extLst xmlns:a="http://schemas.openxmlformats.org/drawingml/2006/main">
               <a:ext uri="{FF2B5EF4-FFF2-40B4-BE49-F238E27FC236}">
-                <a16:creationId xmlns:a16="http://schemas.microsoft.com/office/drawing/2014/main" id="{92D6246A-7375-494E-8A49-E414F2451F71}"/>
+                <a16:creationId xmlns:a16="http://schemas.microsoft.com/office/drawing/2014/main" id="{71637C36-459D-4AA2-B7AD-885089E97BC0}"/>
               </a:ext>
             </a:extLst>
           </p:cNvPr>
@@ -4073,7 +4073,7 @@
           <p:cNvPr id="18" name="">
             <a:extLst xmlns:a="http://schemas.openxmlformats.org/drawingml/2006/main">
               <a:ext uri="{FF2B5EF4-FFF2-40B4-BE49-F238E27FC236}">
-                <a16:creationId xmlns:a16="http://schemas.microsoft.com/office/drawing/2014/main" id="{148FF23E-9FE9-469E-8AF8-7637D7625143}"/>
+                <a16:creationId xmlns:a16="http://schemas.microsoft.com/office/drawing/2014/main" id="{FC78956C-D1C2-46BA-8B46-2B872DA299CC}"/>
               </a:ext>
             </a:extLst>
           </p:cNvPr>
@@ -4123,7 +4123,7 @@
           <p:cNvPr id="19" name="">
             <a:extLst xmlns:a="http://schemas.openxmlformats.org/drawingml/2006/main">
               <a:ext uri="{FF2B5EF4-FFF2-40B4-BE49-F238E27FC236}">
-                <a16:creationId xmlns:a16="http://schemas.microsoft.com/office/drawing/2014/main" id="{AE069C81-9D22-4422-B0E8-08A2C5621E9F}"/>
+                <a16:creationId xmlns:a16="http://schemas.microsoft.com/office/drawing/2014/main" id="{6193161A-3B3B-4543-A535-DBA4D6CE7924}"/>
               </a:ext>
             </a:extLst>
           </p:cNvPr>
@@ -4158,7 +4158,7 @@
           <p:cNvPr id="20" name="">
             <a:extLst xmlns:a="http://schemas.openxmlformats.org/drawingml/2006/main">
               <a:ext uri="{FF2B5EF4-FFF2-40B4-BE49-F238E27FC236}">
-                <a16:creationId xmlns:a16="http://schemas.microsoft.com/office/drawing/2014/main" id="{1F75BFCD-387D-42B3-BDB5-B17717585EAB}"/>
+                <a16:creationId xmlns:a16="http://schemas.microsoft.com/office/drawing/2014/main" id="{C469C17C-89C1-4696-803B-2F7FC98F4840}"/>
               </a:ext>
             </a:extLst>
           </p:cNvPr>
@@ -4208,7 +4208,7 @@
           <p:cNvPr id="21" name="">
             <a:extLst xmlns:a="http://schemas.openxmlformats.org/drawingml/2006/main">
               <a:ext uri="{FF2B5EF4-FFF2-40B4-BE49-F238E27FC236}">
-                <a16:creationId xmlns:a16="http://schemas.microsoft.com/office/drawing/2014/main" id="{C2EA91D7-65FF-4F67-9B0E-D68E18B8E7AC}"/>
+                <a16:creationId xmlns:a16="http://schemas.microsoft.com/office/drawing/2014/main" id="{A490CD05-5204-4353-A298-4AE0C12492AA}"/>
               </a:ext>
             </a:extLst>
           </p:cNvPr>
@@ -4258,7 +4258,7 @@
           <p:cNvPr id="22" name="">
             <a:extLst xmlns:a="http://schemas.openxmlformats.org/drawingml/2006/main">
               <a:ext uri="{FF2B5EF4-FFF2-40B4-BE49-F238E27FC236}">
-                <a16:creationId xmlns:a16="http://schemas.microsoft.com/office/drawing/2014/main" id="{B27D2FA9-89B4-46C0-9D29-A7B5693E07FB}"/>
+                <a16:creationId xmlns:a16="http://schemas.microsoft.com/office/drawing/2014/main" id="{82DD8098-2CE9-4052-9E88-19BD42D19F5B}"/>
               </a:ext>
             </a:extLst>
           </p:cNvPr>
@@ -4325,7 +4325,7 @@
           <p:cNvPr id="23" name="">
             <a:extLst xmlns:a="http://schemas.openxmlformats.org/drawingml/2006/main">
               <a:ext uri="{FF2B5EF4-FFF2-40B4-BE49-F238E27FC236}">
-                <a16:creationId xmlns:a16="http://schemas.microsoft.com/office/drawing/2014/main" id="{A19B8A55-13AD-4B0E-8B85-F0F173E5789D}"/>
+                <a16:creationId xmlns:a16="http://schemas.microsoft.com/office/drawing/2014/main" id="{C4EEB7BF-0D37-4C8C-B156-6A9C7D2D4DBD}"/>
               </a:ext>
             </a:extLst>
           </p:cNvPr>
@@ -4358,7 +4358,7 @@
           <p:cNvPr id="24" name="">
             <a:extLst xmlns:a="http://schemas.openxmlformats.org/drawingml/2006/main">
               <a:ext uri="{FF2B5EF4-FFF2-40B4-BE49-F238E27FC236}">
-                <a16:creationId xmlns:a16="http://schemas.microsoft.com/office/drawing/2014/main" id="{0C38733D-FFFB-4829-8A6B-F172FFE362C8}"/>
+                <a16:creationId xmlns:a16="http://schemas.microsoft.com/office/drawing/2014/main" id="{7D427A18-1B92-4C8E-B2DB-6C2E645992D8}"/>
               </a:ext>
             </a:extLst>
           </p:cNvPr>
@@ -4408,7 +4408,7 @@
           <p:cNvPr id="25" name="">
             <a:extLst xmlns:a="http://schemas.openxmlformats.org/drawingml/2006/main">
               <a:ext uri="{FF2B5EF4-FFF2-40B4-BE49-F238E27FC236}">
-                <a16:creationId xmlns:a16="http://schemas.microsoft.com/office/drawing/2014/main" id="{0A34C217-9EC2-4E44-AA42-D8E7B795B32C}"/>
+                <a16:creationId xmlns:a16="http://schemas.microsoft.com/office/drawing/2014/main" id="{340A657C-DF49-4EC0-84F2-8AED4C481660}"/>
               </a:ext>
             </a:extLst>
           </p:cNvPr>
@@ -4458,7 +4458,7 @@
           <p:cNvPr id="26" name="">
             <a:extLst xmlns:a="http://schemas.openxmlformats.org/drawingml/2006/main">
               <a:ext uri="{FF2B5EF4-FFF2-40B4-BE49-F238E27FC236}">
-                <a16:creationId xmlns:a16="http://schemas.microsoft.com/office/drawing/2014/main" id="{B1BBF1D1-758E-4D6B-9753-137AB8B5AC4C}"/>
+                <a16:creationId xmlns:a16="http://schemas.microsoft.com/office/drawing/2014/main" id="{E01D4397-E1E8-4005-82DF-11D8B0109BEA}"/>
               </a:ext>
             </a:extLst>
           </p:cNvPr>
@@ -4508,7 +4508,7 @@
           <p:cNvPr id="27" name="">
             <a:extLst xmlns:a="http://schemas.openxmlformats.org/drawingml/2006/main">
               <a:ext uri="{FF2B5EF4-FFF2-40B4-BE49-F238E27FC236}">
-                <a16:creationId xmlns:a16="http://schemas.microsoft.com/office/drawing/2014/main" id="{2969FC32-2AEA-4482-AE11-F41579678740}"/>
+                <a16:creationId xmlns:a16="http://schemas.microsoft.com/office/drawing/2014/main" id="{709721FB-3FED-4B72-932D-62C7F256CA08}"/>
               </a:ext>
             </a:extLst>
           </p:cNvPr>
@@ -4556,7 +4556,7 @@
     </p:spTree>
     <p:extLst>
       <p:ext uri="{BB962C8B-B14F-4D97-AF65-F5344CB8AC3E}">
-        <p14:creationId xmlns:p14="http://schemas.microsoft.com/office/powerpoint/2010/main" val="1083716059"/>
+        <p14:creationId xmlns:p14="http://schemas.microsoft.com/office/powerpoint/2010/main" val="610139699"/>
       </p:ext>
     </p:extLst>
   </p:cSld>
@@ -4587,7 +4587,7 @@
           <p:cNvPr id="20" name="">
             <a:extLst xmlns:a="http://schemas.openxmlformats.org/drawingml/2006/main">
               <a:ext uri="{FF2B5EF4-FFF2-40B4-BE49-F238E27FC236}">
-                <a16:creationId xmlns:a16="http://schemas.microsoft.com/office/drawing/2014/main" id="{12FBB360-5AE1-4E54-BEA3-C214AEF7FD51}"/>
+                <a16:creationId xmlns:a16="http://schemas.microsoft.com/office/drawing/2014/main" id="{37B3E3E0-BB54-459A-9784-48AA7246431C}"/>
               </a:ext>
             </a:extLst>
           </p:cNvPr>
@@ -4637,7 +4637,7 @@
           <p:cNvPr id="2" name="">
             <a:extLst xmlns:a="http://schemas.openxmlformats.org/drawingml/2006/main">
               <a:ext uri="{FF2B5EF4-FFF2-40B4-BE49-F238E27FC236}">
-                <a16:creationId xmlns:a16="http://schemas.microsoft.com/office/drawing/2014/main" id="{8620809F-13E5-4E33-8E35-C20F8593882A}"/>
+                <a16:creationId xmlns:a16="http://schemas.microsoft.com/office/drawing/2014/main" id="{B927CD45-309B-4334-8AE1-430AF859D553}"/>
               </a:ext>
             </a:extLst>
           </p:cNvPr>
@@ -4649,30 +4649,30 @@
         <p:spPr>
           <a:xfrm xmlns:a="http://schemas.openxmlformats.org/drawingml/2006/main">
             <a:off x="914400" y="1104900"/>
-            <a:ext cx="10096500" cy="685800"/>
-          </a:xfrm>
-          <a:prstGeom xmlns:a="http://schemas.openxmlformats.org/drawingml/2006/main" prst="rect">
-            <a:avLst/>
-          </a:prstGeom>
-          <a:noFill xmlns:a="http://schemas.openxmlformats.org/drawingml/2006/main"/>
-          <a:ln xmlns:a="http://schemas.openxmlformats.org/drawingml/2006/main" w="0">
-            <a:noFill/>
-            <a:prstDash val="solid"/>
-          </a:ln>
-        </p:spPr>
-        <p:txBody>
-          <a:bodyPr xmlns:a="http://schemas.openxmlformats.org/drawingml/2006/main"/>
-          <a:lstStyle xmlns:a="http://schemas.openxmlformats.org/drawingml/2006/main"/>
-          <a:p xmlns:a="http://schemas.openxmlformats.org/drawingml/2006/main">
-            <a:pPr>
-              <a:defRPr sz="3750" b="1" i="0">
+            <a:ext cx="10287000" cy="1123950"/>
+          </a:xfrm>
+          <a:prstGeom xmlns:a="http://schemas.openxmlformats.org/drawingml/2006/main" prst="rect">
+            <a:avLst/>
+          </a:prstGeom>
+          <a:noFill xmlns:a="http://schemas.openxmlformats.org/drawingml/2006/main"/>
+          <a:ln xmlns:a="http://schemas.openxmlformats.org/drawingml/2006/main" w="0">
+            <a:noFill/>
+            <a:prstDash val="solid"/>
+          </a:ln>
+        </p:spPr>
+        <p:txBody>
+          <a:bodyPr xmlns:a="http://schemas.openxmlformats.org/drawingml/2006/main"/>
+          <a:lstStyle xmlns:a="http://schemas.openxmlformats.org/drawingml/2006/main"/>
+          <a:p xmlns:a="http://schemas.openxmlformats.org/drawingml/2006/main">
+            <a:pPr>
+              <a:defRPr sz="3300" b="1" i="0">
                 <a:solidFill>
                   <a:srgbClr val="17201C"/>
                 </a:solidFill>
               </a:defRPr>
             </a:pPr>
             <a:r>
-              <a:rPr sz="3750" b="1" i="0">
+              <a:rPr sz="3300" b="1" i="0">
                 <a:solidFill>
                   <a:srgbClr val="17201C"/>
                 </a:solidFill>
@@ -4687,18 +4687,18 @@
           <p:cNvPr id="3" name="">
             <a:extLst xmlns:a="http://schemas.openxmlformats.org/drawingml/2006/main">
               <a:ext uri="{FF2B5EF4-FFF2-40B4-BE49-F238E27FC236}">
-                <a16:creationId xmlns:a16="http://schemas.microsoft.com/office/drawing/2014/main" id="{DBF8933D-EC32-4924-B1B4-F3629EECE32C}"/>
-              </a:ext>
-            </a:extLst>
-          </p:cNvPr>
-          <p:cNvSpPr>
-            <a:spLocks xmlns:a="http://schemas.openxmlformats.org/drawingml/2006/main" noGrp="1"/>
-          </p:cNvSpPr>
-          <p:nvPr/>
-        </p:nvSpPr>
-        <p:spPr>
-          <a:xfrm xmlns:a="http://schemas.openxmlformats.org/drawingml/2006/main">
-            <a:off x="933450" y="1943100"/>
+                <a16:creationId xmlns:a16="http://schemas.microsoft.com/office/drawing/2014/main" id="{D300B026-A831-41B3-80F1-4251FB0695DC}"/>
+              </a:ext>
+            </a:extLst>
+          </p:cNvPr>
+          <p:cNvSpPr>
+            <a:spLocks xmlns:a="http://schemas.openxmlformats.org/drawingml/2006/main" noGrp="1"/>
+          </p:cNvSpPr>
+          <p:nvPr/>
+        </p:nvSpPr>
+        <p:spPr>
+          <a:xfrm xmlns:a="http://schemas.openxmlformats.org/drawingml/2006/main">
+            <a:off x="933450" y="2381250"/>
             <a:ext cx="9715500" cy="571500"/>
           </a:xfrm>
           <a:prstGeom xmlns:a="http://schemas.openxmlformats.org/drawingml/2006/main" prst="rect">
@@ -4741,7 +4741,7 @@
           <p:nvPr/>
         </p:nvPicPr>
         <p:blipFill>
-          <a:blip xmlns:r="http://schemas.openxmlformats.org/officeDocument/2006/relationships" xmlns:a="http://schemas.openxmlformats.org/drawingml/2006/main" r:embed="R871cd8eb44eb4802"/>
+          <a:blip xmlns:r="http://schemas.openxmlformats.org/officeDocument/2006/relationships" xmlns:a="http://schemas.openxmlformats.org/drawingml/2006/main" r:embed="R36771c6a88204fcb"/>
           <a:srcRect xmlns:a="http://schemas.openxmlformats.org/drawingml/2006/main" l="0" t="2016" r="0" b="2016"/>
           <a:stretch xmlns:a="http://schemas.openxmlformats.org/drawingml/2006/main">
             <a:fillRect l="0" t="0" r="0" b="0"/>
@@ -4764,7 +4764,7 @@
           <p:cNvPr id="5" name="">
             <a:extLst xmlns:a="http://schemas.openxmlformats.org/drawingml/2006/main">
               <a:ext uri="{FF2B5EF4-FFF2-40B4-BE49-F238E27FC236}">
-                <a16:creationId xmlns:a16="http://schemas.microsoft.com/office/drawing/2014/main" id="{7BE3C050-8A2E-4E23-A5AB-7657C122D49A}"/>
+                <a16:creationId xmlns:a16="http://schemas.microsoft.com/office/drawing/2014/main" id="{2A71959E-1C95-4F21-B5F4-8084E70B2AEC}"/>
               </a:ext>
             </a:extLst>
           </p:cNvPr>
@@ -4799,7 +4799,7 @@
           <p:cNvPr id="6" name="">
             <a:extLst xmlns:a="http://schemas.openxmlformats.org/drawingml/2006/main">
               <a:ext uri="{FF2B5EF4-FFF2-40B4-BE49-F238E27FC236}">
-                <a16:creationId xmlns:a16="http://schemas.microsoft.com/office/drawing/2014/main" id="{5331D39B-139D-45BE-B7DF-BF2E05D513B0}"/>
+                <a16:creationId xmlns:a16="http://schemas.microsoft.com/office/drawing/2014/main" id="{AA2E5898-C40A-4DA6-8EB8-83488CC5F1C0}"/>
               </a:ext>
             </a:extLst>
           </p:cNvPr>
@@ -4849,7 +4849,7 @@
           <p:cNvPr id="7" name="">
             <a:extLst xmlns:a="http://schemas.openxmlformats.org/drawingml/2006/main">
               <a:ext uri="{FF2B5EF4-FFF2-40B4-BE49-F238E27FC236}">
-                <a16:creationId xmlns:a16="http://schemas.microsoft.com/office/drawing/2014/main" id="{0627B75F-BA07-427D-8FE9-CDE42126FAC8}"/>
+                <a16:creationId xmlns:a16="http://schemas.microsoft.com/office/drawing/2014/main" id="{BFE00979-46A4-43B0-A2CC-F319910BBAA9}"/>
               </a:ext>
             </a:extLst>
           </p:cNvPr>
@@ -4882,7 +4882,7 @@
           <p:cNvPr id="8" name="">
             <a:extLst xmlns:a="http://schemas.openxmlformats.org/drawingml/2006/main">
               <a:ext uri="{FF2B5EF4-FFF2-40B4-BE49-F238E27FC236}">
-                <a16:creationId xmlns:a16="http://schemas.microsoft.com/office/drawing/2014/main" id="{9CE0B189-1682-42AE-BAA5-BFC02471F1E3}"/>
+                <a16:creationId xmlns:a16="http://schemas.microsoft.com/office/drawing/2014/main" id="{CD1B78E6-63CC-4F12-B690-8BCB4D82BBE5}"/>
               </a:ext>
             </a:extLst>
           </p:cNvPr>
@@ -4932,7 +4932,7 @@
           <p:cNvPr id="9" name="">
             <a:extLst xmlns:a="http://schemas.openxmlformats.org/drawingml/2006/main">
               <a:ext uri="{FF2B5EF4-FFF2-40B4-BE49-F238E27FC236}">
-                <a16:creationId xmlns:a16="http://schemas.microsoft.com/office/drawing/2014/main" id="{48A42F4E-C7CE-4612-808B-EF3C4299D22B}"/>
+                <a16:creationId xmlns:a16="http://schemas.microsoft.com/office/drawing/2014/main" id="{39B44443-7685-4386-AECE-61F95CEB5334}"/>
               </a:ext>
             </a:extLst>
           </p:cNvPr>
@@ -4965,7 +4965,7 @@
           <p:cNvPr id="10" name="">
             <a:extLst xmlns:a="http://schemas.openxmlformats.org/drawingml/2006/main">
               <a:ext uri="{FF2B5EF4-FFF2-40B4-BE49-F238E27FC236}">
-                <a16:creationId xmlns:a16="http://schemas.microsoft.com/office/drawing/2014/main" id="{3A8F0A8A-C46A-493A-803E-6BD0B85BD6E3}"/>
+                <a16:creationId xmlns:a16="http://schemas.microsoft.com/office/drawing/2014/main" id="{02B481BB-FC01-4D9C-B7CD-EE49FCB997E4}"/>
               </a:ext>
             </a:extLst>
           </p:cNvPr>
@@ -5015,7 +5015,7 @@
           <p:cNvPr id="11" name="">
             <a:extLst xmlns:a="http://schemas.openxmlformats.org/drawingml/2006/main">
               <a:ext uri="{FF2B5EF4-FFF2-40B4-BE49-F238E27FC236}">
-                <a16:creationId xmlns:a16="http://schemas.microsoft.com/office/drawing/2014/main" id="{84868350-A21D-44E7-BA6E-1503975878E5}"/>
+                <a16:creationId xmlns:a16="http://schemas.microsoft.com/office/drawing/2014/main" id="{5BF5AF64-B0DA-4D1E-B7B1-E1B789B335ED}"/>
               </a:ext>
             </a:extLst>
           </p:cNvPr>
@@ -5048,7 +5048,7 @@
           <p:cNvPr id="12" name="">
             <a:extLst xmlns:a="http://schemas.openxmlformats.org/drawingml/2006/main">
               <a:ext uri="{FF2B5EF4-FFF2-40B4-BE49-F238E27FC236}">
-                <a16:creationId xmlns:a16="http://schemas.microsoft.com/office/drawing/2014/main" id="{B0C72B24-25B0-4B90-BEBD-888349136F17}"/>
+                <a16:creationId xmlns:a16="http://schemas.microsoft.com/office/drawing/2014/main" id="{57DEF4BF-BFBF-4932-B075-2A16CF9691C6}"/>
               </a:ext>
             </a:extLst>
           </p:cNvPr>
@@ -5098,7 +5098,7 @@
           <p:cNvPr id="13" name="">
             <a:extLst xmlns:a="http://schemas.openxmlformats.org/drawingml/2006/main">
               <a:ext uri="{FF2B5EF4-FFF2-40B4-BE49-F238E27FC236}">
-                <a16:creationId xmlns:a16="http://schemas.microsoft.com/office/drawing/2014/main" id="{791ED49B-A465-4D27-9467-97C9A3AD56DA}"/>
+                <a16:creationId xmlns:a16="http://schemas.microsoft.com/office/drawing/2014/main" id="{E7FD15E5-16F3-4C43-87CE-922339C6503A}"/>
               </a:ext>
             </a:extLst>
           </p:cNvPr>
@@ -5131,7 +5131,7 @@
           <p:cNvPr id="14" name="">
             <a:extLst xmlns:a="http://schemas.openxmlformats.org/drawingml/2006/main">
               <a:ext uri="{FF2B5EF4-FFF2-40B4-BE49-F238E27FC236}">
-                <a16:creationId xmlns:a16="http://schemas.microsoft.com/office/drawing/2014/main" id="{583F87E4-1CBE-4539-A390-BACA6721672A}"/>
+                <a16:creationId xmlns:a16="http://schemas.microsoft.com/office/drawing/2014/main" id="{94F10371-BE9E-449A-BEEB-19BC3539FD30}"/>
               </a:ext>
             </a:extLst>
           </p:cNvPr>
@@ -5181,7 +5181,7 @@
           <p:cNvPr id="15" name="">
             <a:extLst xmlns:a="http://schemas.openxmlformats.org/drawingml/2006/main">
               <a:ext uri="{FF2B5EF4-FFF2-40B4-BE49-F238E27FC236}">
-                <a16:creationId xmlns:a16="http://schemas.microsoft.com/office/drawing/2014/main" id="{83D6B359-3A49-4971-AA11-76A854A4B3BF}"/>
+                <a16:creationId xmlns:a16="http://schemas.microsoft.com/office/drawing/2014/main" id="{E30B2B03-F93F-4BE2-AB6A-1F02D131740A}"/>
               </a:ext>
             </a:extLst>
           </p:cNvPr>
@@ -5214,7 +5214,7 @@
           <p:cNvPr id="16" name="">
             <a:extLst xmlns:a="http://schemas.openxmlformats.org/drawingml/2006/main">
               <a:ext uri="{FF2B5EF4-FFF2-40B4-BE49-F238E27FC236}">
-                <a16:creationId xmlns:a16="http://schemas.microsoft.com/office/drawing/2014/main" id="{73952659-F0FF-4D2A-8D76-78D0DB92312F}"/>
+                <a16:creationId xmlns:a16="http://schemas.microsoft.com/office/drawing/2014/main" id="{EC546C61-B1CE-4738-B171-39687F6C5839}"/>
               </a:ext>
             </a:extLst>
           </p:cNvPr>
@@ -5264,7 +5264,7 @@
           <p:cNvPr id="17" name="">
             <a:extLst xmlns:a="http://schemas.openxmlformats.org/drawingml/2006/main">
               <a:ext uri="{FF2B5EF4-FFF2-40B4-BE49-F238E27FC236}">
-                <a16:creationId xmlns:a16="http://schemas.microsoft.com/office/drawing/2014/main" id="{755FBAA3-2847-4290-92F9-A354BD19DB55}"/>
+                <a16:creationId xmlns:a16="http://schemas.microsoft.com/office/drawing/2014/main" id="{A8A6A7D1-E378-4B94-8B2C-D4574D5B9591}"/>
               </a:ext>
             </a:extLst>
           </p:cNvPr>
@@ -5314,7 +5314,7 @@
           <p:cNvPr id="18" name="">
             <a:extLst xmlns:a="http://schemas.openxmlformats.org/drawingml/2006/main">
               <a:ext uri="{FF2B5EF4-FFF2-40B4-BE49-F238E27FC236}">
-                <a16:creationId xmlns:a16="http://schemas.microsoft.com/office/drawing/2014/main" id="{6C442CD4-8AF0-4B13-A2AF-3F2A5934AC57}"/>
+                <a16:creationId xmlns:a16="http://schemas.microsoft.com/office/drawing/2014/main" id="{A38C40DD-9806-416B-8C6F-1BA0E454B383}"/>
               </a:ext>
             </a:extLst>
           </p:cNvPr>
@@ -5364,7 +5364,7 @@
           <p:cNvPr id="19" name="">
             <a:extLst xmlns:a="http://schemas.openxmlformats.org/drawingml/2006/main">
               <a:ext uri="{FF2B5EF4-FFF2-40B4-BE49-F238E27FC236}">
-                <a16:creationId xmlns:a16="http://schemas.microsoft.com/office/drawing/2014/main" id="{6B4A86E4-58C6-412F-B408-F486FD04DB4F}"/>
+                <a16:creationId xmlns:a16="http://schemas.microsoft.com/office/drawing/2014/main" id="{7BB845F6-67F6-4635-9E17-E563AD048760}"/>
               </a:ext>
             </a:extLst>
           </p:cNvPr>
@@ -5412,7 +5412,7 @@
     </p:spTree>
     <p:extLst>
       <p:ext uri="{BB962C8B-B14F-4D97-AF65-F5344CB8AC3E}">
-        <p14:creationId xmlns:p14="http://schemas.microsoft.com/office/powerpoint/2010/main" val="652802012"/>
+        <p14:creationId xmlns:p14="http://schemas.microsoft.com/office/powerpoint/2010/main" val="707155145"/>
       </p:ext>
     </p:extLst>
   </p:cSld>
@@ -5443,7 +5443,7 @@
           <p:cNvPr id="20" name="">
             <a:extLst xmlns:a="http://schemas.openxmlformats.org/drawingml/2006/main">
               <a:ext uri="{FF2B5EF4-FFF2-40B4-BE49-F238E27FC236}">
-                <a16:creationId xmlns:a16="http://schemas.microsoft.com/office/drawing/2014/main" id="{23CA3782-6127-4A1B-8FB5-E2146DAB121E}"/>
+                <a16:creationId xmlns:a16="http://schemas.microsoft.com/office/drawing/2014/main" id="{B5BEA548-CF44-453D-807C-0882BD3C6056}"/>
               </a:ext>
             </a:extLst>
           </p:cNvPr>
@@ -5493,7 +5493,7 @@
           <p:cNvPr id="2" name="">
             <a:extLst xmlns:a="http://schemas.openxmlformats.org/drawingml/2006/main">
               <a:ext uri="{FF2B5EF4-FFF2-40B4-BE49-F238E27FC236}">
-                <a16:creationId xmlns:a16="http://schemas.microsoft.com/office/drawing/2014/main" id="{01F34BF2-C7A2-4FFF-AD3E-472FF1340085}"/>
+                <a16:creationId xmlns:a16="http://schemas.microsoft.com/office/drawing/2014/main" id="{7FCE12C3-65FD-497C-97A2-F1A4B57DD8A1}"/>
               </a:ext>
             </a:extLst>
           </p:cNvPr>
@@ -5543,7 +5543,7 @@
           <p:cNvPr id="3" name="">
             <a:extLst xmlns:a="http://schemas.openxmlformats.org/drawingml/2006/main">
               <a:ext uri="{FF2B5EF4-FFF2-40B4-BE49-F238E27FC236}">
-                <a16:creationId xmlns:a16="http://schemas.microsoft.com/office/drawing/2014/main" id="{D1B27D96-CE15-4F3C-8166-5CB55C5A3E42}"/>
+                <a16:creationId xmlns:a16="http://schemas.microsoft.com/office/drawing/2014/main" id="{42949C65-8AC2-4E50-870B-F4E8C960BB6A}"/>
               </a:ext>
             </a:extLst>
           </p:cNvPr>
@@ -5597,7 +5597,7 @@
           <p:nvPr/>
         </p:nvPicPr>
         <p:blipFill>
-          <a:blip xmlns:r="http://schemas.openxmlformats.org/officeDocument/2006/relationships" xmlns:a="http://schemas.openxmlformats.org/drawingml/2006/main" r:embed="R89ed9c01a50b46a8"/>
+          <a:blip xmlns:r="http://schemas.openxmlformats.org/officeDocument/2006/relationships" xmlns:a="http://schemas.openxmlformats.org/drawingml/2006/main" r:embed="Rdf527119ebab4ef0"/>
           <a:srcRect xmlns:a="http://schemas.openxmlformats.org/drawingml/2006/main" l="26893" t="0" r="26893" b="0"/>
           <a:stretch xmlns:a="http://schemas.openxmlformats.org/drawingml/2006/main">
             <a:fillRect l="0" t="0" r="0" b="0"/>
@@ -5620,7 +5620,7 @@
           <p:cNvPr id="5" name="">
             <a:extLst xmlns:a="http://schemas.openxmlformats.org/drawingml/2006/main">
               <a:ext uri="{FF2B5EF4-FFF2-40B4-BE49-F238E27FC236}">
-                <a16:creationId xmlns:a16="http://schemas.microsoft.com/office/drawing/2014/main" id="{A8B286E1-421F-4639-8160-AE222DD570AA}"/>
+                <a16:creationId xmlns:a16="http://schemas.microsoft.com/office/drawing/2014/main" id="{849C71B2-D86E-42EA-B042-FD43DC8727E5}"/>
               </a:ext>
             </a:extLst>
           </p:cNvPr>
@@ -5653,7 +5653,7 @@
           <p:cNvPr id="6" name="">
             <a:extLst xmlns:a="http://schemas.openxmlformats.org/drawingml/2006/main">
               <a:ext uri="{FF2B5EF4-FFF2-40B4-BE49-F238E27FC236}">
-                <a16:creationId xmlns:a16="http://schemas.microsoft.com/office/drawing/2014/main" id="{A0399283-F826-4BCE-8868-19A0DFD6EF4C}"/>
+                <a16:creationId xmlns:a16="http://schemas.microsoft.com/office/drawing/2014/main" id="{B950ACEC-7EAA-4B14-9FC9-DA1890737505}"/>
               </a:ext>
             </a:extLst>
           </p:cNvPr>
@@ -5703,7 +5703,7 @@
           <p:cNvPr id="7" name="">
             <a:extLst xmlns:a="http://schemas.openxmlformats.org/drawingml/2006/main">
               <a:ext uri="{FF2B5EF4-FFF2-40B4-BE49-F238E27FC236}">
-                <a16:creationId xmlns:a16="http://schemas.microsoft.com/office/drawing/2014/main" id="{55CECFC8-D610-4CA6-B5CA-EA72FDAE0918}"/>
+                <a16:creationId xmlns:a16="http://schemas.microsoft.com/office/drawing/2014/main" id="{51D847B8-6495-4400-A5F4-CFD7261119A0}"/>
               </a:ext>
             </a:extLst>
           </p:cNvPr>
@@ -5753,7 +5753,7 @@
           <p:cNvPr id="8" name="">
             <a:extLst xmlns:a="http://schemas.openxmlformats.org/drawingml/2006/main">
               <a:ext uri="{FF2B5EF4-FFF2-40B4-BE49-F238E27FC236}">
-                <a16:creationId xmlns:a16="http://schemas.microsoft.com/office/drawing/2014/main" id="{FB6F0991-7BC8-467B-9545-277F48DAB75D}"/>
+                <a16:creationId xmlns:a16="http://schemas.microsoft.com/office/drawing/2014/main" id="{F73A5ECD-CCCF-4E39-A353-F77140B95DE0}"/>
               </a:ext>
             </a:extLst>
           </p:cNvPr>
@@ -5786,7 +5786,7 @@
           <p:cNvPr id="9" name="">
             <a:extLst xmlns:a="http://schemas.openxmlformats.org/drawingml/2006/main">
               <a:ext uri="{FF2B5EF4-FFF2-40B4-BE49-F238E27FC236}">
-                <a16:creationId xmlns:a16="http://schemas.microsoft.com/office/drawing/2014/main" id="{4CF508D9-A098-4AA6-825C-F3B723578693}"/>
+                <a16:creationId xmlns:a16="http://schemas.microsoft.com/office/drawing/2014/main" id="{2766F276-6776-4A40-B11A-719BF42E8229}"/>
               </a:ext>
             </a:extLst>
           </p:cNvPr>
@@ -5836,7 +5836,7 @@
           <p:cNvPr id="10" name="">
             <a:extLst xmlns:a="http://schemas.openxmlformats.org/drawingml/2006/main">
               <a:ext uri="{FF2B5EF4-FFF2-40B4-BE49-F238E27FC236}">
-                <a16:creationId xmlns:a16="http://schemas.microsoft.com/office/drawing/2014/main" id="{B686FBEC-C987-4AF7-BB95-C01FA424F693}"/>
+                <a16:creationId xmlns:a16="http://schemas.microsoft.com/office/drawing/2014/main" id="{3EBCEA64-8246-4067-BE37-9A6C43840348}"/>
               </a:ext>
             </a:extLst>
           </p:cNvPr>
@@ -5886,7 +5886,7 @@
           <p:cNvPr id="11" name="">
             <a:extLst xmlns:a="http://schemas.openxmlformats.org/drawingml/2006/main">
               <a:ext uri="{FF2B5EF4-FFF2-40B4-BE49-F238E27FC236}">
-                <a16:creationId xmlns:a16="http://schemas.microsoft.com/office/drawing/2014/main" id="{C1F67B35-AAC8-485D-938A-F0F3942BFAD6}"/>
+                <a16:creationId xmlns:a16="http://schemas.microsoft.com/office/drawing/2014/main" id="{38E64336-2892-4C6D-95F1-538D8E3E6B76}"/>
               </a:ext>
             </a:extLst>
           </p:cNvPr>
@@ -5919,7 +5919,7 @@
           <p:cNvPr id="12" name="">
             <a:extLst xmlns:a="http://schemas.openxmlformats.org/drawingml/2006/main">
               <a:ext uri="{FF2B5EF4-FFF2-40B4-BE49-F238E27FC236}">
-                <a16:creationId xmlns:a16="http://schemas.microsoft.com/office/drawing/2014/main" id="{4015ACCF-7A57-4269-BF31-9B98ECCE1654}"/>
+                <a16:creationId xmlns:a16="http://schemas.microsoft.com/office/drawing/2014/main" id="{C9D75329-213C-4A18-8B44-3A77A021D1BE}"/>
               </a:ext>
             </a:extLst>
           </p:cNvPr>
@@ -5969,7 +5969,7 @@
           <p:cNvPr id="13" name="">
             <a:extLst xmlns:a="http://schemas.openxmlformats.org/drawingml/2006/main">
               <a:ext uri="{FF2B5EF4-FFF2-40B4-BE49-F238E27FC236}">
-                <a16:creationId xmlns:a16="http://schemas.microsoft.com/office/drawing/2014/main" id="{F5BA5A57-C5DA-4357-BBFF-3AAB47F82E24}"/>
+                <a16:creationId xmlns:a16="http://schemas.microsoft.com/office/drawing/2014/main" id="{6F4DB55B-02EE-49C8-983D-0E50AB5AFD0E}"/>
               </a:ext>
             </a:extLst>
           </p:cNvPr>
@@ -6019,7 +6019,7 @@
           <p:cNvPr id="14" name="">
             <a:extLst xmlns:a="http://schemas.openxmlformats.org/drawingml/2006/main">
               <a:ext uri="{FF2B5EF4-FFF2-40B4-BE49-F238E27FC236}">
-                <a16:creationId xmlns:a16="http://schemas.microsoft.com/office/drawing/2014/main" id="{56E7DA57-C215-495A-8A07-7CA212528919}"/>
+                <a16:creationId xmlns:a16="http://schemas.microsoft.com/office/drawing/2014/main" id="{1F5D6197-1B99-4BE5-9C30-1F76677F962A}"/>
               </a:ext>
             </a:extLst>
           </p:cNvPr>
@@ -6052,7 +6052,7 @@
           <p:cNvPr id="15" name="">
             <a:extLst xmlns:a="http://schemas.openxmlformats.org/drawingml/2006/main">
               <a:ext uri="{FF2B5EF4-FFF2-40B4-BE49-F238E27FC236}">
-                <a16:creationId xmlns:a16="http://schemas.microsoft.com/office/drawing/2014/main" id="{872620B7-D043-4E39-94EC-C944EFFE163B}"/>
+                <a16:creationId xmlns:a16="http://schemas.microsoft.com/office/drawing/2014/main" id="{642080D5-AF02-43FE-90FF-E4288D34FDDC}"/>
               </a:ext>
             </a:extLst>
           </p:cNvPr>
@@ -6102,7 +6102,7 @@
           <p:cNvPr id="16" name="">
             <a:extLst xmlns:a="http://schemas.openxmlformats.org/drawingml/2006/main">
               <a:ext uri="{FF2B5EF4-FFF2-40B4-BE49-F238E27FC236}">
-                <a16:creationId xmlns:a16="http://schemas.microsoft.com/office/drawing/2014/main" id="{47D26643-C5DA-4CB1-A5A3-25F79801B187}"/>
+                <a16:creationId xmlns:a16="http://schemas.microsoft.com/office/drawing/2014/main" id="{2CB8B28E-72F0-4588-ADE7-381E4FCDD4FD}"/>
               </a:ext>
             </a:extLst>
           </p:cNvPr>
@@ -6152,7 +6152,7 @@
           <p:cNvPr id="17" name="">
             <a:extLst xmlns:a="http://schemas.openxmlformats.org/drawingml/2006/main">
               <a:ext uri="{FF2B5EF4-FFF2-40B4-BE49-F238E27FC236}">
-                <a16:creationId xmlns:a16="http://schemas.microsoft.com/office/drawing/2014/main" id="{4D5F7F9E-C524-4E19-B4BF-176C6F412B87}"/>
+                <a16:creationId xmlns:a16="http://schemas.microsoft.com/office/drawing/2014/main" id="{7407B0D1-AC56-42EA-9AFE-FDB038FB04ED}"/>
               </a:ext>
             </a:extLst>
           </p:cNvPr>
@@ -6202,7 +6202,7 @@
           <p:cNvPr id="18" name="">
             <a:extLst xmlns:a="http://schemas.openxmlformats.org/drawingml/2006/main">
               <a:ext uri="{FF2B5EF4-FFF2-40B4-BE49-F238E27FC236}">
-                <a16:creationId xmlns:a16="http://schemas.microsoft.com/office/drawing/2014/main" id="{A69823D6-235A-4E3F-B4E2-4B073185E4E0}"/>
+                <a16:creationId xmlns:a16="http://schemas.microsoft.com/office/drawing/2014/main" id="{4C9A905A-4724-4E9E-8D5B-D60E5708DBAD}"/>
               </a:ext>
             </a:extLst>
           </p:cNvPr>
@@ -6252,7 +6252,7 @@
           <p:cNvPr id="19" name="">
             <a:extLst xmlns:a="http://schemas.openxmlformats.org/drawingml/2006/main">
               <a:ext uri="{FF2B5EF4-FFF2-40B4-BE49-F238E27FC236}">
-                <a16:creationId xmlns:a16="http://schemas.microsoft.com/office/drawing/2014/main" id="{2744B2B9-78DF-4BDD-8723-B7909F0913A4}"/>
+                <a16:creationId xmlns:a16="http://schemas.microsoft.com/office/drawing/2014/main" id="{3A19E20D-A5D0-47B8-B755-8060C1417CA2}"/>
               </a:ext>
             </a:extLst>
           </p:cNvPr>
@@ -6300,7 +6300,7 @@
     </p:spTree>
     <p:extLst>
       <p:ext uri="{BB962C8B-B14F-4D97-AF65-F5344CB8AC3E}">
-        <p14:creationId xmlns:p14="http://schemas.microsoft.com/office/powerpoint/2010/main" val="465896443"/>
+        <p14:creationId xmlns:p14="http://schemas.microsoft.com/office/powerpoint/2010/main" val="2034039533"/>
       </p:ext>
     </p:extLst>
   </p:cSld>
@@ -6331,7 +6331,7 @@
           <p:cNvPr id="31" name="">
             <a:extLst xmlns:a="http://schemas.openxmlformats.org/drawingml/2006/main">
               <a:ext uri="{FF2B5EF4-FFF2-40B4-BE49-F238E27FC236}">
-                <a16:creationId xmlns:a16="http://schemas.microsoft.com/office/drawing/2014/main" id="{CAF3BA12-07CC-4A6F-9875-FB2F153D4D96}"/>
+                <a16:creationId xmlns:a16="http://schemas.microsoft.com/office/drawing/2014/main" id="{4D6DE114-8503-404F-8A65-BF9A335E3D40}"/>
               </a:ext>
             </a:extLst>
           </p:cNvPr>
@@ -6381,7 +6381,7 @@
           <p:cNvPr id="2" name="">
             <a:extLst xmlns:a="http://schemas.openxmlformats.org/drawingml/2006/main">
               <a:ext uri="{FF2B5EF4-FFF2-40B4-BE49-F238E27FC236}">
-                <a16:creationId xmlns:a16="http://schemas.microsoft.com/office/drawing/2014/main" id="{2A5B52C7-01B5-4B7E-8A0D-6382CAE8AC15}"/>
+                <a16:creationId xmlns:a16="http://schemas.microsoft.com/office/drawing/2014/main" id="{74F0B26B-8C92-4394-B501-A4D18624043D}"/>
               </a:ext>
             </a:extLst>
           </p:cNvPr>
@@ -6431,7 +6431,7 @@
           <p:cNvPr id="3" name="">
             <a:extLst xmlns:a="http://schemas.openxmlformats.org/drawingml/2006/main">
               <a:ext uri="{FF2B5EF4-FFF2-40B4-BE49-F238E27FC236}">
-                <a16:creationId xmlns:a16="http://schemas.microsoft.com/office/drawing/2014/main" id="{6C5D49B4-5496-4C8A-B375-3E66671FD5BC}"/>
+                <a16:creationId xmlns:a16="http://schemas.microsoft.com/office/drawing/2014/main" id="{E7BB6467-F503-4E07-9590-73C280F8108A}"/>
               </a:ext>
             </a:extLst>
           </p:cNvPr>
@@ -6481,7 +6481,7 @@
           <p:cNvPr id="4" name="">
             <a:extLst xmlns:a="http://schemas.openxmlformats.org/drawingml/2006/main">
               <a:ext uri="{FF2B5EF4-FFF2-40B4-BE49-F238E27FC236}">
-                <a16:creationId xmlns:a16="http://schemas.microsoft.com/office/drawing/2014/main" id="{19AE3084-24B4-453B-8628-263A1CC59815}"/>
+                <a16:creationId xmlns:a16="http://schemas.microsoft.com/office/drawing/2014/main" id="{1A0F5BC4-B4FA-4D1B-B55B-6C26D8BB0EA1}"/>
               </a:ext>
             </a:extLst>
           </p:cNvPr>
@@ -6516,7 +6516,7 @@
           <p:cNvPr id="5" name="">
             <a:extLst xmlns:a="http://schemas.openxmlformats.org/drawingml/2006/main">
               <a:ext uri="{FF2B5EF4-FFF2-40B4-BE49-F238E27FC236}">
-                <a16:creationId xmlns:a16="http://schemas.microsoft.com/office/drawing/2014/main" id="{9B48AE4F-E398-4BC9-B936-B021EC9F70BB}"/>
+                <a16:creationId xmlns:a16="http://schemas.microsoft.com/office/drawing/2014/main" id="{6CFF2F5B-D023-40FD-B234-07D6EF31086C}"/>
               </a:ext>
             </a:extLst>
           </p:cNvPr>
@@ -6566,7 +6566,7 @@
           <p:cNvPr id="6" name="">
             <a:extLst xmlns:a="http://schemas.openxmlformats.org/drawingml/2006/main">
               <a:ext uri="{FF2B5EF4-FFF2-40B4-BE49-F238E27FC236}">
-                <a16:creationId xmlns:a16="http://schemas.microsoft.com/office/drawing/2014/main" id="{7689B0B5-2482-470B-A63B-4E4D6E6006E1}"/>
+                <a16:creationId xmlns:a16="http://schemas.microsoft.com/office/drawing/2014/main" id="{20063F51-370F-4B2C-8717-FF834F142BE0}"/>
               </a:ext>
             </a:extLst>
           </p:cNvPr>
@@ -6616,7 +6616,7 @@
           <p:cNvPr id="7" name="">
             <a:extLst xmlns:a="http://schemas.openxmlformats.org/drawingml/2006/main">
               <a:ext uri="{FF2B5EF4-FFF2-40B4-BE49-F238E27FC236}">
-                <a16:creationId xmlns:a16="http://schemas.microsoft.com/office/drawing/2014/main" id="{8B09B56B-F338-4835-95C6-E6A61993BFDC}"/>
+                <a16:creationId xmlns:a16="http://schemas.microsoft.com/office/drawing/2014/main" id="{D86CC115-FFA9-41ED-ABCA-6EF6452ABD95}"/>
               </a:ext>
             </a:extLst>
           </p:cNvPr>
@@ -6666,7 +6666,7 @@
           <p:cNvPr id="8" name="">
             <a:extLst xmlns:a="http://schemas.openxmlformats.org/drawingml/2006/main">
               <a:ext uri="{FF2B5EF4-FFF2-40B4-BE49-F238E27FC236}">
-                <a16:creationId xmlns:a16="http://schemas.microsoft.com/office/drawing/2014/main" id="{4C951FF6-1689-434E-AA3E-BE336FDE7C31}"/>
+                <a16:creationId xmlns:a16="http://schemas.microsoft.com/office/drawing/2014/main" id="{576CA334-412F-478E-85A5-51B1C5B9EC4C}"/>
               </a:ext>
             </a:extLst>
           </p:cNvPr>
@@ -6699,7 +6699,7 @@
           <p:cNvPr id="9" name="">
             <a:extLst xmlns:a="http://schemas.openxmlformats.org/drawingml/2006/main">
               <a:ext uri="{FF2B5EF4-FFF2-40B4-BE49-F238E27FC236}">
-                <a16:creationId xmlns:a16="http://schemas.microsoft.com/office/drawing/2014/main" id="{5E5C44D8-14EE-4985-B510-CC2653BEC332}"/>
+                <a16:creationId xmlns:a16="http://schemas.microsoft.com/office/drawing/2014/main" id="{743BDD72-3199-4C99-AA75-8CA76FB33699}"/>
               </a:ext>
             </a:extLst>
           </p:cNvPr>
@@ -6749,7 +6749,7 @@
           <p:cNvPr id="10" name="">
             <a:extLst xmlns:a="http://schemas.openxmlformats.org/drawingml/2006/main">
               <a:ext uri="{FF2B5EF4-FFF2-40B4-BE49-F238E27FC236}">
-                <a16:creationId xmlns:a16="http://schemas.microsoft.com/office/drawing/2014/main" id="{49A4A02A-6562-4DA0-AAB0-5ABDC908A191}"/>
+                <a16:creationId xmlns:a16="http://schemas.microsoft.com/office/drawing/2014/main" id="{FD0956E6-2DD7-47D3-981C-13A08CCB3C49}"/>
               </a:ext>
             </a:extLst>
           </p:cNvPr>
@@ -6799,7 +6799,7 @@
           <p:cNvPr id="11" name="">
             <a:extLst xmlns:a="http://schemas.openxmlformats.org/drawingml/2006/main">
               <a:ext uri="{FF2B5EF4-FFF2-40B4-BE49-F238E27FC236}">
-                <a16:creationId xmlns:a16="http://schemas.microsoft.com/office/drawing/2014/main" id="{E5FE802C-6498-42B6-8BE3-A32B269A6FE3}"/>
+                <a16:creationId xmlns:a16="http://schemas.microsoft.com/office/drawing/2014/main" id="{01A47AD8-805C-49EC-AA4B-C960BB6A677D}"/>
               </a:ext>
             </a:extLst>
           </p:cNvPr>
@@ -6834,7 +6834,7 @@
           <p:cNvPr id="12" name="">
             <a:extLst xmlns:a="http://schemas.openxmlformats.org/drawingml/2006/main">
               <a:ext uri="{FF2B5EF4-FFF2-40B4-BE49-F238E27FC236}">
-                <a16:creationId xmlns:a16="http://schemas.microsoft.com/office/drawing/2014/main" id="{D700C31A-719F-4BAE-81A7-A19C590A0D48}"/>
+                <a16:creationId xmlns:a16="http://schemas.microsoft.com/office/drawing/2014/main" id="{EFCDC25F-7E8D-46C9-995E-CA7FD79DEC6B}"/>
               </a:ext>
             </a:extLst>
           </p:cNvPr>
@@ -6884,7 +6884,7 @@
           <p:cNvPr id="13" name="">
             <a:extLst xmlns:a="http://schemas.openxmlformats.org/drawingml/2006/main">
               <a:ext uri="{FF2B5EF4-FFF2-40B4-BE49-F238E27FC236}">
-                <a16:creationId xmlns:a16="http://schemas.microsoft.com/office/drawing/2014/main" id="{3CB624A7-319C-4762-A85B-FBA11332E2C0}"/>
+                <a16:creationId xmlns:a16="http://schemas.microsoft.com/office/drawing/2014/main" id="{917E0AA6-EEFC-4E40-962A-F58B5D2E72A9}"/>
               </a:ext>
             </a:extLst>
           </p:cNvPr>
@@ -6934,7 +6934,7 @@
           <p:cNvPr id="14" name="">
             <a:extLst xmlns:a="http://schemas.openxmlformats.org/drawingml/2006/main">
               <a:ext uri="{FF2B5EF4-FFF2-40B4-BE49-F238E27FC236}">
-                <a16:creationId xmlns:a16="http://schemas.microsoft.com/office/drawing/2014/main" id="{9F30B1BD-7BEF-4436-BC1E-BC8D59F9619E}"/>
+                <a16:creationId xmlns:a16="http://schemas.microsoft.com/office/drawing/2014/main" id="{7741278F-229B-4C65-99C0-611FB099FD0B}"/>
               </a:ext>
             </a:extLst>
           </p:cNvPr>
@@ -6967,7 +6967,7 @@
           <p:cNvPr id="15" name="">
             <a:extLst xmlns:a="http://schemas.openxmlformats.org/drawingml/2006/main">
               <a:ext uri="{FF2B5EF4-FFF2-40B4-BE49-F238E27FC236}">
-                <a16:creationId xmlns:a16="http://schemas.microsoft.com/office/drawing/2014/main" id="{047926CE-BF1E-4D2E-ADE0-03D95752DD6C}"/>
+                <a16:creationId xmlns:a16="http://schemas.microsoft.com/office/drawing/2014/main" id="{A8F4C7C7-70B7-4DDE-BB9F-3E28EC9E4E2E}"/>
               </a:ext>
             </a:extLst>
           </p:cNvPr>
@@ -7017,7 +7017,7 @@
           <p:cNvPr id="16" name="">
             <a:extLst xmlns:a="http://schemas.openxmlformats.org/drawingml/2006/main">
               <a:ext uri="{FF2B5EF4-FFF2-40B4-BE49-F238E27FC236}">
-                <a16:creationId xmlns:a16="http://schemas.microsoft.com/office/drawing/2014/main" id="{83C4C481-9265-47B8-B617-28C90C4461F6}"/>
+                <a16:creationId xmlns:a16="http://schemas.microsoft.com/office/drawing/2014/main" id="{36B7193A-94B4-49D7-80CD-2C40C95E905B}"/>
               </a:ext>
             </a:extLst>
           </p:cNvPr>
@@ -7050,7 +7050,7 @@
           <p:cNvPr id="17" name="">
             <a:extLst xmlns:a="http://schemas.openxmlformats.org/drawingml/2006/main">
               <a:ext uri="{FF2B5EF4-FFF2-40B4-BE49-F238E27FC236}">
-                <a16:creationId xmlns:a16="http://schemas.microsoft.com/office/drawing/2014/main" id="{85FB0F92-96EA-4532-AA46-87C25817B247}"/>
+                <a16:creationId xmlns:a16="http://schemas.microsoft.com/office/drawing/2014/main" id="{BE71594F-BD3F-4BA3-A16D-862EE04BC2FB}"/>
               </a:ext>
             </a:extLst>
           </p:cNvPr>
@@ -7100,7 +7100,7 @@
           <p:cNvPr id="18" name="">
             <a:extLst xmlns:a="http://schemas.openxmlformats.org/drawingml/2006/main">
               <a:ext uri="{FF2B5EF4-FFF2-40B4-BE49-F238E27FC236}">
-                <a16:creationId xmlns:a16="http://schemas.microsoft.com/office/drawing/2014/main" id="{C7AC95CF-DD3D-40CB-BD05-C02EA30FEEA1}"/>
+                <a16:creationId xmlns:a16="http://schemas.microsoft.com/office/drawing/2014/main" id="{D15EB96D-397A-4616-80DF-1D0626237741}"/>
               </a:ext>
             </a:extLst>
           </p:cNvPr>
@@ -7133,7 +7133,7 @@
           <p:cNvPr id="19" name="">
             <a:extLst xmlns:a="http://schemas.openxmlformats.org/drawingml/2006/main">
               <a:ext uri="{FF2B5EF4-FFF2-40B4-BE49-F238E27FC236}">
-                <a16:creationId xmlns:a16="http://schemas.microsoft.com/office/drawing/2014/main" id="{9E11000A-5EA6-4378-8676-CAE6F967A50F}"/>
+                <a16:creationId xmlns:a16="http://schemas.microsoft.com/office/drawing/2014/main" id="{22F6D22C-5F9B-4ABB-ABB3-CC19C36E29F1}"/>
               </a:ext>
             </a:extLst>
           </p:cNvPr>
@@ -7183,7 +7183,7 @@
           <p:cNvPr id="20" name="">
             <a:extLst xmlns:a="http://schemas.openxmlformats.org/drawingml/2006/main">
               <a:ext uri="{FF2B5EF4-FFF2-40B4-BE49-F238E27FC236}">
-                <a16:creationId xmlns:a16="http://schemas.microsoft.com/office/drawing/2014/main" id="{00D125C3-5994-4689-B4D9-8D48A2477FCC}"/>
+                <a16:creationId xmlns:a16="http://schemas.microsoft.com/office/drawing/2014/main" id="{464965D5-BA4E-42F4-BA38-E3B44E417BF2}"/>
               </a:ext>
             </a:extLst>
           </p:cNvPr>
@@ -7216,7 +7216,7 @@
           <p:cNvPr id="21" name="">
             <a:extLst xmlns:a="http://schemas.openxmlformats.org/drawingml/2006/main">
               <a:ext uri="{FF2B5EF4-FFF2-40B4-BE49-F238E27FC236}">
-                <a16:creationId xmlns:a16="http://schemas.microsoft.com/office/drawing/2014/main" id="{61CDD051-269C-4368-9EA1-FD078BB449F4}"/>
+                <a16:creationId xmlns:a16="http://schemas.microsoft.com/office/drawing/2014/main" id="{449227F4-DD61-4670-B8F2-7A58F5A0EB85}"/>
               </a:ext>
             </a:extLst>
           </p:cNvPr>
@@ -7266,7 +7266,7 @@
           <p:cNvPr id="22" name="">
             <a:extLst xmlns:a="http://schemas.openxmlformats.org/drawingml/2006/main">
               <a:ext uri="{FF2B5EF4-FFF2-40B4-BE49-F238E27FC236}">
-                <a16:creationId xmlns:a16="http://schemas.microsoft.com/office/drawing/2014/main" id="{A768BC03-845E-4B7C-8501-867B7A7CCF22}"/>
+                <a16:creationId xmlns:a16="http://schemas.microsoft.com/office/drawing/2014/main" id="{67EE124F-AC95-4DFD-8CC0-DBF67D821209}"/>
               </a:ext>
             </a:extLst>
           </p:cNvPr>
@@ -7316,7 +7316,7 @@
           <p:cNvPr id="23" name="">
             <a:extLst xmlns:a="http://schemas.openxmlformats.org/drawingml/2006/main">
               <a:ext uri="{FF2B5EF4-FFF2-40B4-BE49-F238E27FC236}">
-                <a16:creationId xmlns:a16="http://schemas.microsoft.com/office/drawing/2014/main" id="{77725948-CF62-423C-8403-1CE4D2F81545}"/>
+                <a16:creationId xmlns:a16="http://schemas.microsoft.com/office/drawing/2014/main" id="{6C6FB58E-C856-4080-B0BA-89751F052D91}"/>
               </a:ext>
             </a:extLst>
           </p:cNvPr>
@@ -7351,7 +7351,7 @@
           <p:cNvPr id="24" name="">
             <a:extLst xmlns:a="http://schemas.openxmlformats.org/drawingml/2006/main">
               <a:ext uri="{FF2B5EF4-FFF2-40B4-BE49-F238E27FC236}">
-                <a16:creationId xmlns:a16="http://schemas.microsoft.com/office/drawing/2014/main" id="{5BA9E404-6A9D-4AAD-A261-BD2E1936CB41}"/>
+                <a16:creationId xmlns:a16="http://schemas.microsoft.com/office/drawing/2014/main" id="{D60EC264-7C69-4917-B2D5-4505BD3D6DF3}"/>
               </a:ext>
             </a:extLst>
           </p:cNvPr>
@@ -7401,7 +7401,7 @@
           <p:cNvPr id="25" name="">
             <a:extLst xmlns:a="http://schemas.openxmlformats.org/drawingml/2006/main">
               <a:ext uri="{FF2B5EF4-FFF2-40B4-BE49-F238E27FC236}">
-                <a16:creationId xmlns:a16="http://schemas.microsoft.com/office/drawing/2014/main" id="{93712F6C-3436-45B0-B2B3-D0DFB5D3576E}"/>
+                <a16:creationId xmlns:a16="http://schemas.microsoft.com/office/drawing/2014/main" id="{BC7607B9-2942-4CA2-AF1B-49D49838BCE2}"/>
               </a:ext>
             </a:extLst>
           </p:cNvPr>
@@ -7468,7 +7468,7 @@
           <p:cNvPr id="26" name="">
             <a:extLst xmlns:a="http://schemas.openxmlformats.org/drawingml/2006/main">
               <a:ext uri="{FF2B5EF4-FFF2-40B4-BE49-F238E27FC236}">
-                <a16:creationId xmlns:a16="http://schemas.microsoft.com/office/drawing/2014/main" id="{B74A2E31-386A-4CF5-A86A-E79D049561C3}"/>
+                <a16:creationId xmlns:a16="http://schemas.microsoft.com/office/drawing/2014/main" id="{F4817AB3-09A7-4F2B-BE1B-0192C54437D8}"/>
               </a:ext>
             </a:extLst>
           </p:cNvPr>
@@ -7518,7 +7518,7 @@
           <p:cNvPr id="27" name="">
             <a:extLst xmlns:a="http://schemas.openxmlformats.org/drawingml/2006/main">
               <a:ext uri="{FF2B5EF4-FFF2-40B4-BE49-F238E27FC236}">
-                <a16:creationId xmlns:a16="http://schemas.microsoft.com/office/drawing/2014/main" id="{50BB9886-CAA6-4E75-8956-7A895415D209}"/>
+                <a16:creationId xmlns:a16="http://schemas.microsoft.com/office/drawing/2014/main" id="{5D774414-C292-46C7-8BBD-47FF892DCBD8}"/>
               </a:ext>
             </a:extLst>
           </p:cNvPr>
@@ -7551,7 +7551,7 @@
           <p:cNvPr id="28" name="">
             <a:extLst xmlns:a="http://schemas.openxmlformats.org/drawingml/2006/main">
               <a:ext uri="{FF2B5EF4-FFF2-40B4-BE49-F238E27FC236}">
-                <a16:creationId xmlns:a16="http://schemas.microsoft.com/office/drawing/2014/main" id="{FD405868-2849-491C-8C9B-266E50CD586C}"/>
+                <a16:creationId xmlns:a16="http://schemas.microsoft.com/office/drawing/2014/main" id="{3C19AEB7-7FEE-4FAF-BB76-C216CAD1EA3A}"/>
               </a:ext>
             </a:extLst>
           </p:cNvPr>
@@ -7601,7 +7601,7 @@
           <p:cNvPr id="29" name="">
             <a:extLst xmlns:a="http://schemas.openxmlformats.org/drawingml/2006/main">
               <a:ext uri="{FF2B5EF4-FFF2-40B4-BE49-F238E27FC236}">
-                <a16:creationId xmlns:a16="http://schemas.microsoft.com/office/drawing/2014/main" id="{E1FDAEA5-9004-45E7-8517-D0A65F135CEA}"/>
+                <a16:creationId xmlns:a16="http://schemas.microsoft.com/office/drawing/2014/main" id="{393FD6A8-0546-4315-BA50-146E08BBF88A}"/>
               </a:ext>
             </a:extLst>
           </p:cNvPr>
@@ -7651,7 +7651,7 @@
           <p:cNvPr id="30" name="">
             <a:extLst xmlns:a="http://schemas.openxmlformats.org/drawingml/2006/main">
               <a:ext uri="{FF2B5EF4-FFF2-40B4-BE49-F238E27FC236}">
-                <a16:creationId xmlns:a16="http://schemas.microsoft.com/office/drawing/2014/main" id="{B2A88C42-AF54-4C0A-AB41-C7A484DD3DD7}"/>
+                <a16:creationId xmlns:a16="http://schemas.microsoft.com/office/drawing/2014/main" id="{CCB27DF9-E92D-47D4-B7CF-F2CADE1BF27E}"/>
               </a:ext>
             </a:extLst>
           </p:cNvPr>
@@ -7699,7 +7699,7 @@
     </p:spTree>
     <p:extLst>
       <p:ext uri="{BB962C8B-B14F-4D97-AF65-F5344CB8AC3E}">
-        <p14:creationId xmlns:p14="http://schemas.microsoft.com/office/powerpoint/2010/main" val="1510928333"/>
+        <p14:creationId xmlns:p14="http://schemas.microsoft.com/office/powerpoint/2010/main" val="1765141875"/>
       </p:ext>
     </p:extLst>
   </p:cSld>
@@ -7730,7 +7730,7 @@
           <p:cNvPr id="16" name="">
             <a:extLst xmlns:a="http://schemas.openxmlformats.org/drawingml/2006/main">
               <a:ext uri="{FF2B5EF4-FFF2-40B4-BE49-F238E27FC236}">
-                <a16:creationId xmlns:a16="http://schemas.microsoft.com/office/drawing/2014/main" id="{CCBA589A-72F3-48C4-A0A2-7224D5B36079}"/>
+                <a16:creationId xmlns:a16="http://schemas.microsoft.com/office/drawing/2014/main" id="{5A9F4495-10EA-4750-A766-9313F283E922}"/>
               </a:ext>
             </a:extLst>
           </p:cNvPr>
@@ -7780,7 +7780,7 @@
           <p:cNvPr id="2" name="">
             <a:extLst xmlns:a="http://schemas.openxmlformats.org/drawingml/2006/main">
               <a:ext uri="{FF2B5EF4-FFF2-40B4-BE49-F238E27FC236}">
-                <a16:creationId xmlns:a16="http://schemas.microsoft.com/office/drawing/2014/main" id="{93877791-CE35-4746-8B25-E294698A3299}"/>
+                <a16:creationId xmlns:a16="http://schemas.microsoft.com/office/drawing/2014/main" id="{5D2A54D0-DE38-44D0-AD64-CCEEE985AE78}"/>
               </a:ext>
             </a:extLst>
           </p:cNvPr>
@@ -7830,7 +7830,7 @@
           <p:cNvPr id="3" name="">
             <a:extLst xmlns:a="http://schemas.openxmlformats.org/drawingml/2006/main">
               <a:ext uri="{FF2B5EF4-FFF2-40B4-BE49-F238E27FC236}">
-                <a16:creationId xmlns:a16="http://schemas.microsoft.com/office/drawing/2014/main" id="{E0381E6A-90FF-4720-B939-0765AD9285BF}"/>
+                <a16:creationId xmlns:a16="http://schemas.microsoft.com/office/drawing/2014/main" id="{2D6B9B89-5C9F-4E4A-A893-FB411F3DA115}"/>
               </a:ext>
             </a:extLst>
           </p:cNvPr>
@@ -7884,7 +7884,7 @@
           <p:nvPr/>
         </p:nvPicPr>
         <p:blipFill>
-          <a:blip xmlns:r="http://schemas.openxmlformats.org/officeDocument/2006/relationships" xmlns:a="http://schemas.openxmlformats.org/drawingml/2006/main" r:embed="Re2e8970e35454674"/>
+          <a:blip xmlns:r="http://schemas.openxmlformats.org/officeDocument/2006/relationships" xmlns:a="http://schemas.openxmlformats.org/drawingml/2006/main" r:embed="Rd44fe68bba8c418e"/>
           <a:srcRect xmlns:a="http://schemas.openxmlformats.org/drawingml/2006/main" l="4026" t="0" r="4026" b="0"/>
           <a:stretch xmlns:a="http://schemas.openxmlformats.org/drawingml/2006/main">
             <a:fillRect l="0" t="0" r="0" b="0"/>
@@ -7911,7 +7911,7 @@
           <p:nvPr/>
         </p:nvPicPr>
         <p:blipFill>
-          <a:blip xmlns:r="http://schemas.openxmlformats.org/officeDocument/2006/relationships" xmlns:a="http://schemas.openxmlformats.org/drawingml/2006/main" r:embed="R8820149d82264055"/>
+          <a:blip xmlns:r="http://schemas.openxmlformats.org/officeDocument/2006/relationships" xmlns:a="http://schemas.openxmlformats.org/drawingml/2006/main" r:embed="Ra5878bcab44644ca"/>
           <a:srcRect xmlns:a="http://schemas.openxmlformats.org/drawingml/2006/main" l="5108" t="0" r="5108" b="0"/>
           <a:stretch xmlns:a="http://schemas.openxmlformats.org/drawingml/2006/main">
             <a:fillRect l="0" t="0" r="0" b="0"/>
@@ -7934,7 +7934,7 @@
           <p:cNvPr id="6" name="">
             <a:extLst xmlns:a="http://schemas.openxmlformats.org/drawingml/2006/main">
               <a:ext uri="{FF2B5EF4-FFF2-40B4-BE49-F238E27FC236}">
-                <a16:creationId xmlns:a16="http://schemas.microsoft.com/office/drawing/2014/main" id="{0CB04059-3498-4F3D-A186-A0F8A8F99968}"/>
+                <a16:creationId xmlns:a16="http://schemas.microsoft.com/office/drawing/2014/main" id="{533F9BBB-43A1-474D-BD74-8E551FF12933}"/>
               </a:ext>
             </a:extLst>
           </p:cNvPr>
@@ -7969,7 +7969,7 @@
           <p:cNvPr id="7" name="">
             <a:extLst xmlns:a="http://schemas.openxmlformats.org/drawingml/2006/main">
               <a:ext uri="{FF2B5EF4-FFF2-40B4-BE49-F238E27FC236}">
-                <a16:creationId xmlns:a16="http://schemas.microsoft.com/office/drawing/2014/main" id="{ED68F7D1-088F-4266-9DD6-B1097496E873}"/>
+                <a16:creationId xmlns:a16="http://schemas.microsoft.com/office/drawing/2014/main" id="{DF8A7793-221D-4E1D-AB34-F32EF439D0E5}"/>
               </a:ext>
             </a:extLst>
           </p:cNvPr>
@@ -8019,7 +8019,7 @@
           <p:cNvPr id="8" name="">
             <a:extLst xmlns:a="http://schemas.openxmlformats.org/drawingml/2006/main">
               <a:ext uri="{FF2B5EF4-FFF2-40B4-BE49-F238E27FC236}">
-                <a16:creationId xmlns:a16="http://schemas.microsoft.com/office/drawing/2014/main" id="{DADFF5AE-D9AE-4528-A5F6-271CF25EE2B1}"/>
+                <a16:creationId xmlns:a16="http://schemas.microsoft.com/office/drawing/2014/main" id="{B26E8559-F762-429B-A47F-5DE53EEF609E}"/>
               </a:ext>
             </a:extLst>
           </p:cNvPr>
@@ -8054,7 +8054,7 @@
           <p:cNvPr id="9" name="">
             <a:extLst xmlns:a="http://schemas.openxmlformats.org/drawingml/2006/main">
               <a:ext uri="{FF2B5EF4-FFF2-40B4-BE49-F238E27FC236}">
-                <a16:creationId xmlns:a16="http://schemas.microsoft.com/office/drawing/2014/main" id="{D01AF979-3EC9-4D02-B83E-14390E941B73}"/>
+                <a16:creationId xmlns:a16="http://schemas.microsoft.com/office/drawing/2014/main" id="{62B30535-1648-49BA-A24C-C2F6FCE3E780}"/>
               </a:ext>
             </a:extLst>
           </p:cNvPr>
@@ -8104,7 +8104,7 @@
           <p:cNvPr id="10" name="">
             <a:extLst xmlns:a="http://schemas.openxmlformats.org/drawingml/2006/main">
               <a:ext uri="{FF2B5EF4-FFF2-40B4-BE49-F238E27FC236}">
-                <a16:creationId xmlns:a16="http://schemas.microsoft.com/office/drawing/2014/main" id="{9D0E3DBC-CABC-49EE-A7BA-AA5969C077A6}"/>
+                <a16:creationId xmlns:a16="http://schemas.microsoft.com/office/drawing/2014/main" id="{3F1AFEDD-CBED-4916-B428-BC909B33D456}"/>
               </a:ext>
             </a:extLst>
           </p:cNvPr>
@@ -8139,7 +8139,7 @@
           <p:cNvPr id="11" name="">
             <a:extLst xmlns:a="http://schemas.openxmlformats.org/drawingml/2006/main">
               <a:ext uri="{FF2B5EF4-FFF2-40B4-BE49-F238E27FC236}">
-                <a16:creationId xmlns:a16="http://schemas.microsoft.com/office/drawing/2014/main" id="{9A656B5C-35DE-4A32-9C5E-676BA233C2EB}"/>
+                <a16:creationId xmlns:a16="http://schemas.microsoft.com/office/drawing/2014/main" id="{5F481528-44FA-4E6B-8096-A37E133A2199}"/>
               </a:ext>
             </a:extLst>
           </p:cNvPr>
@@ -8189,7 +8189,7 @@
           <p:cNvPr id="12" name="">
             <a:extLst xmlns:a="http://schemas.openxmlformats.org/drawingml/2006/main">
               <a:ext uri="{FF2B5EF4-FFF2-40B4-BE49-F238E27FC236}">
-                <a16:creationId xmlns:a16="http://schemas.microsoft.com/office/drawing/2014/main" id="{38DC1833-9027-4CBF-B937-C7731482797B}"/>
+                <a16:creationId xmlns:a16="http://schemas.microsoft.com/office/drawing/2014/main" id="{510CD98A-FD5E-4F3C-975D-53469DE5641B}"/>
               </a:ext>
             </a:extLst>
           </p:cNvPr>
@@ -8224,7 +8224,7 @@
           <p:cNvPr id="13" name="">
             <a:extLst xmlns:a="http://schemas.openxmlformats.org/drawingml/2006/main">
               <a:ext uri="{FF2B5EF4-FFF2-40B4-BE49-F238E27FC236}">
-                <a16:creationId xmlns:a16="http://schemas.microsoft.com/office/drawing/2014/main" id="{71E173EE-76CC-4E49-A1F5-2F2F62BA9FB3}"/>
+                <a16:creationId xmlns:a16="http://schemas.microsoft.com/office/drawing/2014/main" id="{09D98A78-9D7D-449A-A5EF-A565396C7FA8}"/>
               </a:ext>
             </a:extLst>
           </p:cNvPr>
@@ -8274,7 +8274,7 @@
           <p:cNvPr id="14" name="">
             <a:extLst xmlns:a="http://schemas.openxmlformats.org/drawingml/2006/main">
               <a:ext uri="{FF2B5EF4-FFF2-40B4-BE49-F238E27FC236}">
-                <a16:creationId xmlns:a16="http://schemas.microsoft.com/office/drawing/2014/main" id="{C03295A2-974C-40EB-878F-50F9FB9BF6C9}"/>
+                <a16:creationId xmlns:a16="http://schemas.microsoft.com/office/drawing/2014/main" id="{15CDE528-EFF9-41A7-B91A-140F5FA184A1}"/>
               </a:ext>
             </a:extLst>
           </p:cNvPr>
@@ -8324,7 +8324,7 @@
           <p:cNvPr id="15" name="">
             <a:extLst xmlns:a="http://schemas.openxmlformats.org/drawingml/2006/main">
               <a:ext uri="{FF2B5EF4-FFF2-40B4-BE49-F238E27FC236}">
-                <a16:creationId xmlns:a16="http://schemas.microsoft.com/office/drawing/2014/main" id="{44192DF8-603F-4342-AA61-87187159008E}"/>
+                <a16:creationId xmlns:a16="http://schemas.microsoft.com/office/drawing/2014/main" id="{DF56B4ED-F88D-4797-87BC-BA1FC5D9848E}"/>
               </a:ext>
             </a:extLst>
           </p:cNvPr>
@@ -8372,7 +8372,7 @@
     </p:spTree>
     <p:extLst>
       <p:ext uri="{BB962C8B-B14F-4D97-AF65-F5344CB8AC3E}">
-        <p14:creationId xmlns:p14="http://schemas.microsoft.com/office/powerpoint/2010/main" val="1321898781"/>
+        <p14:creationId xmlns:p14="http://schemas.microsoft.com/office/powerpoint/2010/main" val="1991065292"/>
       </p:ext>
     </p:extLst>
   </p:cSld>
@@ -8403,7 +8403,7 @@
           <p:cNvPr id="18" name="">
             <a:extLst xmlns:a="http://schemas.openxmlformats.org/drawingml/2006/main">
               <a:ext uri="{FF2B5EF4-FFF2-40B4-BE49-F238E27FC236}">
-                <a16:creationId xmlns:a16="http://schemas.microsoft.com/office/drawing/2014/main" id="{CA15C0EE-0B7C-4E27-BE4C-871E21A8F5F8}"/>
+                <a16:creationId xmlns:a16="http://schemas.microsoft.com/office/drawing/2014/main" id="{0E6DCCAC-47A6-46CA-8AC5-8494F89AD007}"/>
               </a:ext>
             </a:extLst>
           </p:cNvPr>
@@ -8434,7 +8434,7 @@
           <p:cNvPr id="2" name="">
             <a:extLst xmlns:a="http://schemas.openxmlformats.org/drawingml/2006/main">
               <a:ext uri="{FF2B5EF4-FFF2-40B4-BE49-F238E27FC236}">
-                <a16:creationId xmlns:a16="http://schemas.microsoft.com/office/drawing/2014/main" id="{BAFFFA43-ED93-40F1-AE0C-A06C01A6D95B}"/>
+                <a16:creationId xmlns:a16="http://schemas.microsoft.com/office/drawing/2014/main" id="{08D2E403-EEE6-4E0E-AC63-F0C89F6984C7}"/>
               </a:ext>
             </a:extLst>
           </p:cNvPr>
@@ -8484,7 +8484,7 @@
           <p:cNvPr id="3" name="">
             <a:extLst xmlns:a="http://schemas.openxmlformats.org/drawingml/2006/main">
               <a:ext uri="{FF2B5EF4-FFF2-40B4-BE49-F238E27FC236}">
-                <a16:creationId xmlns:a16="http://schemas.microsoft.com/office/drawing/2014/main" id="{755B589F-44F1-4657-A1A9-09A0EAD449CA}"/>
+                <a16:creationId xmlns:a16="http://schemas.microsoft.com/office/drawing/2014/main" id="{D889C361-F699-4FC4-B524-C977C4D2DB41}"/>
               </a:ext>
             </a:extLst>
           </p:cNvPr>
@@ -8568,7 +8568,7 @@
           <p:cNvPr id="4" name="">
             <a:extLst xmlns:a="http://schemas.openxmlformats.org/drawingml/2006/main">
               <a:ext uri="{FF2B5EF4-FFF2-40B4-BE49-F238E27FC236}">
-                <a16:creationId xmlns:a16="http://schemas.microsoft.com/office/drawing/2014/main" id="{5F34D07F-B2EA-4D94-8E9C-400722ECC216}"/>
+                <a16:creationId xmlns:a16="http://schemas.microsoft.com/office/drawing/2014/main" id="{BCC441A4-5C72-429F-A1B3-9828607CF092}"/>
               </a:ext>
             </a:extLst>
           </p:cNvPr>
@@ -8618,7 +8618,7 @@
           <p:cNvPr id="5" name="">
             <a:extLst xmlns:a="http://schemas.openxmlformats.org/drawingml/2006/main">
               <a:ext uri="{FF2B5EF4-FFF2-40B4-BE49-F238E27FC236}">
-                <a16:creationId xmlns:a16="http://schemas.microsoft.com/office/drawing/2014/main" id="{87AEF349-2068-498D-A139-3B17B307A535}"/>
+                <a16:creationId xmlns:a16="http://schemas.microsoft.com/office/drawing/2014/main" id="{02CDEF8C-FDFE-47DB-94E0-F1179399A0DB}"/>
               </a:ext>
             </a:extLst>
           </p:cNvPr>
@@ -8649,7 +8649,7 @@
           <p:cNvPr id="6" name="">
             <a:extLst xmlns:a="http://schemas.openxmlformats.org/drawingml/2006/main">
               <a:ext uri="{FF2B5EF4-FFF2-40B4-BE49-F238E27FC236}">
-                <a16:creationId xmlns:a16="http://schemas.microsoft.com/office/drawing/2014/main" id="{8992C74E-5A2A-4443-A070-AA97BA26F90D}"/>
+                <a16:creationId xmlns:a16="http://schemas.microsoft.com/office/drawing/2014/main" id="{70A600AD-6D6B-47A6-9432-B30BFDE5549D}"/>
               </a:ext>
             </a:extLst>
           </p:cNvPr>
@@ -8699,7 +8699,7 @@
           <p:cNvPr id="7" name="">
             <a:extLst xmlns:a="http://schemas.openxmlformats.org/drawingml/2006/main">
               <a:ext uri="{FF2B5EF4-FFF2-40B4-BE49-F238E27FC236}">
-                <a16:creationId xmlns:a16="http://schemas.microsoft.com/office/drawing/2014/main" id="{6F955168-5C2B-4268-99A5-C640DFFD9766}"/>
+                <a16:creationId xmlns:a16="http://schemas.microsoft.com/office/drawing/2014/main" id="{7730DB78-D892-467D-9F2F-31C7FB9892CE}"/>
               </a:ext>
             </a:extLst>
           </p:cNvPr>
@@ -8749,7 +8749,7 @@
           <p:cNvPr id="8" name="">
             <a:extLst xmlns:a="http://schemas.openxmlformats.org/drawingml/2006/main">
               <a:ext uri="{FF2B5EF4-FFF2-40B4-BE49-F238E27FC236}">
-                <a16:creationId xmlns:a16="http://schemas.microsoft.com/office/drawing/2014/main" id="{326A8C1E-A3F1-4312-B906-1C2878BBAC50}"/>
+                <a16:creationId xmlns:a16="http://schemas.microsoft.com/office/drawing/2014/main" id="{C92C7BC3-F8CF-4765-B2E4-86464B6B2BCB}"/>
               </a:ext>
             </a:extLst>
           </p:cNvPr>
@@ -8799,7 +8799,7 @@
           <p:cNvPr id="9" name="">
             <a:extLst xmlns:a="http://schemas.openxmlformats.org/drawingml/2006/main">
               <a:ext uri="{FF2B5EF4-FFF2-40B4-BE49-F238E27FC236}">
-                <a16:creationId xmlns:a16="http://schemas.microsoft.com/office/drawing/2014/main" id="{21182D20-8FB2-4031-84F7-83C47378C36C}"/>
+                <a16:creationId xmlns:a16="http://schemas.microsoft.com/office/drawing/2014/main" id="{7BC7354F-8376-4225-A521-C873B5257F9F}"/>
               </a:ext>
             </a:extLst>
           </p:cNvPr>
@@ -8849,7 +8849,7 @@
           <p:cNvPr id="10" name="">
             <a:extLst xmlns:a="http://schemas.openxmlformats.org/drawingml/2006/main">
               <a:ext uri="{FF2B5EF4-FFF2-40B4-BE49-F238E27FC236}">
-                <a16:creationId xmlns:a16="http://schemas.microsoft.com/office/drawing/2014/main" id="{50BBD630-28BD-435B-9AF6-B4D24E8F72C9}"/>
+                <a16:creationId xmlns:a16="http://schemas.microsoft.com/office/drawing/2014/main" id="{107B876E-D9F8-4307-9BF3-536F4E35ABC6}"/>
               </a:ext>
             </a:extLst>
           </p:cNvPr>
@@ -8899,7 +8899,7 @@
           <p:cNvPr id="11" name="">
             <a:extLst xmlns:a="http://schemas.openxmlformats.org/drawingml/2006/main">
               <a:ext uri="{FF2B5EF4-FFF2-40B4-BE49-F238E27FC236}">
-                <a16:creationId xmlns:a16="http://schemas.microsoft.com/office/drawing/2014/main" id="{129B1DC2-5BCF-4523-A8F4-4E9CB0FD9A7F}"/>
+                <a16:creationId xmlns:a16="http://schemas.microsoft.com/office/drawing/2014/main" id="{B747C683-33B3-42A0-A7CE-273C0DD3FB6D}"/>
               </a:ext>
             </a:extLst>
           </p:cNvPr>
@@ -8949,7 +8949,7 @@
           <p:cNvPr id="12" name="">
             <a:extLst xmlns:a="http://schemas.openxmlformats.org/drawingml/2006/main">
               <a:ext uri="{FF2B5EF4-FFF2-40B4-BE49-F238E27FC236}">
-                <a16:creationId xmlns:a16="http://schemas.microsoft.com/office/drawing/2014/main" id="{BBFE8939-30FE-40E1-A99C-D62F8BF487A7}"/>
+                <a16:creationId xmlns:a16="http://schemas.microsoft.com/office/drawing/2014/main" id="{FE9C480B-5E97-47C5-A73B-F862E19DB24F}"/>
               </a:ext>
             </a:extLst>
           </p:cNvPr>
@@ -8999,7 +8999,7 @@
           <p:cNvPr id="13" name="">
             <a:extLst xmlns:a="http://schemas.openxmlformats.org/drawingml/2006/main">
               <a:ext uri="{FF2B5EF4-FFF2-40B4-BE49-F238E27FC236}">
-                <a16:creationId xmlns:a16="http://schemas.microsoft.com/office/drawing/2014/main" id="{0433502E-1A27-4C0B-A0B4-E01724751837}"/>
+                <a16:creationId xmlns:a16="http://schemas.microsoft.com/office/drawing/2014/main" id="{7F1600BE-7C75-4D3C-BF16-78338FA750DF}"/>
               </a:ext>
             </a:extLst>
           </p:cNvPr>
@@ -9049,7 +9049,7 @@
           <p:cNvPr id="14" name="">
             <a:extLst xmlns:a="http://schemas.openxmlformats.org/drawingml/2006/main">
               <a:ext uri="{FF2B5EF4-FFF2-40B4-BE49-F238E27FC236}">
-                <a16:creationId xmlns:a16="http://schemas.microsoft.com/office/drawing/2014/main" id="{74662DD2-819E-498E-B238-A2E981B3B5B1}"/>
+                <a16:creationId xmlns:a16="http://schemas.microsoft.com/office/drawing/2014/main" id="{414113B7-8401-4DC8-88AA-C58B58E27397}"/>
               </a:ext>
             </a:extLst>
           </p:cNvPr>
@@ -9099,7 +9099,7 @@
           <p:cNvPr id="15" name="">
             <a:extLst xmlns:a="http://schemas.openxmlformats.org/drawingml/2006/main">
               <a:ext uri="{FF2B5EF4-FFF2-40B4-BE49-F238E27FC236}">
-                <a16:creationId xmlns:a16="http://schemas.microsoft.com/office/drawing/2014/main" id="{95F1C76B-7AC3-419F-A995-0845CAC71940}"/>
+                <a16:creationId xmlns:a16="http://schemas.microsoft.com/office/drawing/2014/main" id="{3AA6AA3E-0D7B-42F6-8B84-EBEBB4828A32}"/>
               </a:ext>
             </a:extLst>
           </p:cNvPr>
@@ -9132,7 +9132,7 @@
           <p:cNvPr id="16" name="">
             <a:extLst xmlns:a="http://schemas.openxmlformats.org/drawingml/2006/main">
               <a:ext uri="{FF2B5EF4-FFF2-40B4-BE49-F238E27FC236}">
-                <a16:creationId xmlns:a16="http://schemas.microsoft.com/office/drawing/2014/main" id="{3C6B171F-53F1-491D-BF35-56361F58E121}"/>
+                <a16:creationId xmlns:a16="http://schemas.microsoft.com/office/drawing/2014/main" id="{ABD168B1-2E54-448C-94CB-17BA7AE83E09}"/>
               </a:ext>
             </a:extLst>
           </p:cNvPr>
@@ -9182,7 +9182,7 @@
           <p:cNvPr id="17" name="">
             <a:extLst xmlns:a="http://schemas.openxmlformats.org/drawingml/2006/main">
               <a:ext uri="{FF2B5EF4-FFF2-40B4-BE49-F238E27FC236}">
-                <a16:creationId xmlns:a16="http://schemas.microsoft.com/office/drawing/2014/main" id="{8E6AB445-2E10-4D95-9D8F-F87C36C01B22}"/>
+                <a16:creationId xmlns:a16="http://schemas.microsoft.com/office/drawing/2014/main" id="{17AAAE76-AEF6-42F6-AF1F-589770FC425C}"/>
               </a:ext>
             </a:extLst>
           </p:cNvPr>
@@ -9230,7 +9230,7 @@
     </p:spTree>
     <p:extLst>
       <p:ext uri="{BB962C8B-B14F-4D97-AF65-F5344CB8AC3E}">
-        <p14:creationId xmlns:p14="http://schemas.microsoft.com/office/powerpoint/2010/main" val="474822160"/>
+        <p14:creationId xmlns:p14="http://schemas.microsoft.com/office/powerpoint/2010/main" val="404630030"/>
       </p:ext>
     </p:extLst>
   </p:cSld>
